--- a/TI.1.3. PAO202651_RESTFUL_JAVA_SINBDD_NRC36884_GR09/05. DOCUMENTACION/CONVUNI_RESTFUL_JAVA_GR09.pptx
+++ b/TI.1.3. PAO202651_RESTFUL_JAVA_SINBDD_NRC36884_GR09/05. DOCUMENTACION/CONVUNI_RESTFUL_JAVA_GR09.pptx
@@ -18386,7 +18386,7 @@
                   <a:schemeClr val="lt1"/>
                 </a:solidFill>
               </a:rPr>
-              <a:t>INTEGRANTE:</a:t>
+              <a:t>INTEGRANTES:</a:t>
             </a:r>
           </a:p>
           <a:p>
@@ -18410,6 +18410,27 @@
                 </a:solidFill>
               </a:rPr>
               <a:t>JULIO ENRIQUE VICHE CASTILLO</a:t>
+            </a:r>
+          </a:p>
+          <a:p>
+            <a:pPr marL="0" lvl="0" indent="0" algn="l" rtl="0">
+              <a:lnSpc>
+                <a:spcPct val="100000"/>
+              </a:lnSpc>
+              <a:spcBef>
+                <a:spcPts val="0"/>
+              </a:spcBef>
+              <a:spcAft>
+                <a:spcPts val="0"/>
+              </a:spcAft>
+            </a:pPr>
+            <a:r>
+              <a:rPr lang="es-ES" b="1">
+                <a:solidFill>
+                  <a:schemeClr val="lt1"/>
+                </a:solidFill>
+              </a:rPr>
+              <a:t>GABRIEL OMAR MURILLO MEDINA</a:t>
             </a:r>
           </a:p>
           <a:p>

--- a/TI.1.3. PAO202651_RESTFUL_JAVA_SINBDD_NRC36884_GR09/05. DOCUMENTACION/CONVUNI_RESTFUL_JAVA_GR09.pptx
+++ b/TI.1.3. PAO202651_RESTFUL_JAVA_SINBDD_NRC36884_GR09/05. DOCUMENTACION/CONVUNI_RESTFUL_JAVA_GR09.pptx
@@ -19350,18 +19350,19 @@
           </a:p>
         </p:txBody>
       </p:sp>
-      <p:sp>
-        <p:nvSpPr>
-          <p:cNvPr id="2" name="CAPTURA PENDIENTE - Controlador y cliente de servicio">
-            <a:extLst>
-              <a:ext uri="{FF2B5EF4-FFF2-40B4-BE49-F238E27FC236}">
-                <a16:creationId xmlns:a16="http://schemas.microsoft.com/office/drawing/2014/main" id="{EC1BEABE-3CC2-47C6-878A-D718228FE067}"/>
-              </a:ext>
-            </a:extLst>
-          </p:cNvPr>
-          <p:cNvSpPr/>
+      <p:pic>
+        <p:nvPicPr>
+          <p:cNvPr id="242" name="image27.png"/>
+          <p:cNvPicPr/>
           <p:nvPr/>
-        </p:nvSpPr>
+        </p:nvPicPr>
+        <p:blipFill>
+          <a:blip r:embed="rId3"/>
+          <a:srcRect/>
+          <a:stretch>
+            <a:fillRect/>
+          </a:stretch>
+        </p:blipFill>
         <p:spPr>
           <a:xfrm>
             <a:off x="4100618" y="4064763"/>
@@ -19370,80 +19371,26 @@
           <a:prstGeom prst="rect">
             <a:avLst/>
           </a:prstGeom>
-          <a:solidFill>
-            <a:srgbClr val="FFFFFF"/>
-          </a:solidFill>
-          <a:ln w="15875">
+          <a:ln w="12700">
             <a:solidFill>
-              <a:srgbClr val="D9D9D9"/>
+              <a:srgbClr val="CCCCCC"/>
             </a:solidFill>
           </a:ln>
         </p:spPr>
-        <p:style>
-          <a:lnRef idx="2">
-            <a:schemeClr val="accent1">
-              <a:shade val="50000"/>
-            </a:schemeClr>
-          </a:lnRef>
-          <a:fillRef idx="1">
-            <a:schemeClr val="accent1"/>
-          </a:fillRef>
-          <a:effectRef idx="0">
-            <a:schemeClr val="accent1"/>
-          </a:effectRef>
-          <a:fontRef idx="minor">
-            <a:schemeClr val="lt1"/>
-          </a:fontRef>
-        </p:style>
-        <p:txBody>
-          <a:bodyPr wrap="square" lIns="76200" tIns="38100" rIns="76200" bIns="38100" rtlCol="0" anchor="ctr">
-            <a:noAutofit/>
-          </a:bodyPr>
-          <a:lstStyle/>
-          <a:p>
-            <a:pPr algn="ctr"/>
-            <a:r>
-              <a:rPr lang="es-ES" sz="900" i="1">
-                <a:solidFill>
-                  <a:srgbClr val="666666"/>
-                </a:solidFill>
-                <a:latin typeface="Arial" panose="020B0604020202020204" pitchFamily="34" charset="0"/>
-              </a:rPr>
-              <a:t>CAPTURA PENDIENTE</a:t>
-            </a:r>
-          </a:p>
-          <a:p>
-            <a:pPr algn="ctr"/>
-            <a:r>
-              <a:rPr lang="es-ES" sz="900" i="1">
-                <a:solidFill>
-                  <a:srgbClr val="666666"/>
-                </a:solidFill>
-                <a:latin typeface="Arial" panose="020B0604020202020204" pitchFamily="34" charset="0"/>
-              </a:rPr>
-              <a:t>Controlador y cliente de servicio</a:t>
-            </a:r>
-            <a:endParaRPr lang="en-US" sz="900" i="1">
-              <a:solidFill>
-                <a:srgbClr val="666666"/>
-              </a:solidFill>
-              <a:latin typeface="Arial" panose="020B0604020202020204" pitchFamily="34" charset="0"/>
-            </a:endParaRPr>
-          </a:p>
-        </p:txBody>
-      </p:sp>
-      <p:sp>
-        <p:nvSpPr>
-          <p:cNvPr id="4" name="CAPTURA PENDIENTE - Modelo de solicitud de conversión">
-            <a:extLst>
-              <a:ext uri="{FF2B5EF4-FFF2-40B4-BE49-F238E27FC236}">
-                <a16:creationId xmlns:a16="http://schemas.microsoft.com/office/drawing/2014/main" id="{F56BC7F3-638C-483C-977F-A1DD0317B91F}"/>
-              </a:ext>
-            </a:extLst>
-          </p:cNvPr>
-          <p:cNvSpPr/>
+      </p:pic>
+      <p:pic>
+        <p:nvPicPr>
+          <p:cNvPr id="243" name="image28.png"/>
+          <p:cNvPicPr/>
           <p:nvPr/>
-        </p:nvSpPr>
+        </p:nvPicPr>
+        <p:blipFill>
+          <a:blip r:embed="rId4"/>
+          <a:srcRect/>
+          <a:stretch>
+            <a:fillRect/>
+          </a:stretch>
+        </p:blipFill>
         <p:spPr>
           <a:xfrm>
             <a:off x="811793" y="4064763"/>
@@ -19452,68 +19399,13 @@
           <a:prstGeom prst="rect">
             <a:avLst/>
           </a:prstGeom>
-          <a:solidFill>
-            <a:srgbClr val="FFFFFF"/>
-          </a:solidFill>
-          <a:ln w="15875">
+          <a:ln w="12700">
             <a:solidFill>
-              <a:srgbClr val="D9D9D9"/>
+              <a:srgbClr val="CCCCCC"/>
             </a:solidFill>
           </a:ln>
         </p:spPr>
-        <p:style>
-          <a:lnRef idx="2">
-            <a:schemeClr val="accent1">
-              <a:shade val="50000"/>
-            </a:schemeClr>
-          </a:lnRef>
-          <a:fillRef idx="1">
-            <a:schemeClr val="accent1"/>
-          </a:fillRef>
-          <a:effectRef idx="0">
-            <a:schemeClr val="accent1"/>
-          </a:effectRef>
-          <a:fontRef idx="minor">
-            <a:schemeClr val="lt1"/>
-          </a:fontRef>
-        </p:style>
-        <p:txBody>
-          <a:bodyPr wrap="square" lIns="76200" tIns="38100" rIns="76200" bIns="38100" rtlCol="0" anchor="ctr">
-            <a:noAutofit/>
-          </a:bodyPr>
-          <a:lstStyle/>
-          <a:p>
-            <a:pPr algn="ctr"/>
-            <a:r>
-              <a:rPr lang="es-ES" sz="900" i="1">
-                <a:solidFill>
-                  <a:srgbClr val="666666"/>
-                </a:solidFill>
-                <a:latin typeface="Arial" panose="020B0604020202020204" pitchFamily="34" charset="0"/>
-              </a:rPr>
-              <a:t>CAPTURA PENDIENTE</a:t>
-            </a:r>
-          </a:p>
-          <a:p>
-            <a:pPr algn="ctr"/>
-            <a:r>
-              <a:rPr lang="es-ES" sz="900" i="1">
-                <a:solidFill>
-                  <a:srgbClr val="666666"/>
-                </a:solidFill>
-                <a:latin typeface="Arial" panose="020B0604020202020204" pitchFamily="34" charset="0"/>
-              </a:rPr>
-              <a:t>Modelo de solicitud de conversión</a:t>
-            </a:r>
-            <a:endParaRPr lang="en-US" sz="900" i="1">
-              <a:solidFill>
-                <a:srgbClr val="666666"/>
-              </a:solidFill>
-              <a:latin typeface="Arial" panose="020B0604020202020204" pitchFamily="34" charset="0"/>
-            </a:endParaRPr>
-          </a:p>
-        </p:txBody>
-      </p:sp>
+      </p:pic>
     </p:spTree>
   </p:cSld>
   <p:clrMapOvr>
@@ -20127,18 +20019,19 @@
           </a:p>
         </p:txBody>
       </p:sp>
-      <p:sp>
-        <p:nvSpPr>
-          <p:cNvPr id="2" name="CAPTURA PENDIENTE - Menú y vista del cliente de consola">
-            <a:extLst>
-              <a:ext uri="{FF2B5EF4-FFF2-40B4-BE49-F238E27FC236}">
-                <a16:creationId xmlns:a16="http://schemas.microsoft.com/office/drawing/2014/main" id="{7ED2DC89-90CA-4D4C-8DDE-39E28A817C05}"/>
-              </a:ext>
-            </a:extLst>
-          </p:cNvPr>
-          <p:cNvSpPr/>
+      <p:pic>
+        <p:nvPicPr>
+          <p:cNvPr id="251" name="image26.png"/>
+          <p:cNvPicPr/>
           <p:nvPr/>
-        </p:nvSpPr>
+        </p:nvPicPr>
+        <p:blipFill>
+          <a:blip r:embed="rId3"/>
+          <a:srcRect/>
+          <a:stretch>
+            <a:fillRect/>
+          </a:stretch>
+        </p:blipFill>
         <p:spPr>
           <a:xfrm>
             <a:off x="4361215" y="2617179"/>
@@ -20147,68 +20040,13 @@
           <a:prstGeom prst="rect">
             <a:avLst/>
           </a:prstGeom>
-          <a:solidFill>
-            <a:srgbClr val="FFFFFF"/>
-          </a:solidFill>
-          <a:ln w="15875">
+          <a:ln w="12700">
             <a:solidFill>
-              <a:srgbClr val="D9D9D9"/>
+              <a:srgbClr val="CCCCCC"/>
             </a:solidFill>
           </a:ln>
         </p:spPr>
-        <p:style>
-          <a:lnRef idx="2">
-            <a:schemeClr val="accent1">
-              <a:shade val="50000"/>
-            </a:schemeClr>
-          </a:lnRef>
-          <a:fillRef idx="1">
-            <a:schemeClr val="accent1"/>
-          </a:fillRef>
-          <a:effectRef idx="0">
-            <a:schemeClr val="accent1"/>
-          </a:effectRef>
-          <a:fontRef idx="minor">
-            <a:schemeClr val="lt1"/>
-          </a:fontRef>
-        </p:style>
-        <p:txBody>
-          <a:bodyPr wrap="square" lIns="76200" tIns="38100" rIns="76200" bIns="38100" rtlCol="0" anchor="ctr">
-            <a:noAutofit/>
-          </a:bodyPr>
-          <a:lstStyle/>
-          <a:p>
-            <a:pPr algn="ctr"/>
-            <a:r>
-              <a:rPr lang="es-ES" sz="900" i="1">
-                <a:solidFill>
-                  <a:srgbClr val="666666"/>
-                </a:solidFill>
-                <a:latin typeface="Arial" panose="020B0604020202020204" pitchFamily="34" charset="0"/>
-              </a:rPr>
-              <a:t>CAPTURA PENDIENTE</a:t>
-            </a:r>
-          </a:p>
-          <a:p>
-            <a:pPr algn="ctr"/>
-            <a:r>
-              <a:rPr lang="es-ES" sz="900" i="1">
-                <a:solidFill>
-                  <a:srgbClr val="666666"/>
-                </a:solidFill>
-                <a:latin typeface="Arial" panose="020B0604020202020204" pitchFamily="34" charset="0"/>
-              </a:rPr>
-              <a:t>Menú y vista del cliente de consola</a:t>
-            </a:r>
-            <a:endParaRPr lang="en-US" sz="900" i="1">
-              <a:solidFill>
-                <a:srgbClr val="666666"/>
-              </a:solidFill>
-              <a:latin typeface="Arial" panose="020B0604020202020204" pitchFamily="34" charset="0"/>
-            </a:endParaRPr>
-          </a:p>
-        </p:txBody>
-      </p:sp>
+      </p:pic>
     </p:spTree>
   </p:cSld>
   <p:clrMapOvr>
@@ -20798,18 +20636,19 @@
           </a:p>
         </p:txBody>
       </p:sp>
-      <p:sp>
-        <p:nvSpPr>
-          <p:cNvPr id="2" name="CAPTURA PENDIENTE - Resultado de conversión">
-            <a:extLst>
-              <a:ext uri="{FF2B5EF4-FFF2-40B4-BE49-F238E27FC236}">
-                <a16:creationId xmlns:a16="http://schemas.microsoft.com/office/drawing/2014/main" id="{E21B58B1-4044-4DC0-8DA3-EB703ACEED95}"/>
-              </a:ext>
-            </a:extLst>
-          </p:cNvPr>
-          <p:cNvSpPr/>
+      <p:pic>
+        <p:nvPicPr>
+          <p:cNvPr id="259" name="image30.png"/>
+          <p:cNvPicPr/>
           <p:nvPr/>
-        </p:nvSpPr>
+        </p:nvPicPr>
+        <p:blipFill>
+          <a:blip r:embed="rId3"/>
+          <a:srcRect/>
+          <a:stretch>
+            <a:fillRect/>
+          </a:stretch>
+        </p:blipFill>
         <p:spPr>
           <a:xfrm>
             <a:off x="6143877" y="3004463"/>
@@ -20818,80 +20657,26 @@
           <a:prstGeom prst="rect">
             <a:avLst/>
           </a:prstGeom>
-          <a:solidFill>
-            <a:srgbClr val="FFFFFF"/>
-          </a:solidFill>
-          <a:ln w="15875">
+          <a:ln w="12700">
             <a:solidFill>
-              <a:srgbClr val="D9D9D9"/>
+              <a:srgbClr val="CCCCCC"/>
             </a:solidFill>
           </a:ln>
         </p:spPr>
-        <p:style>
-          <a:lnRef idx="2">
-            <a:schemeClr val="accent1">
-              <a:shade val="50000"/>
-            </a:schemeClr>
-          </a:lnRef>
-          <a:fillRef idx="1">
-            <a:schemeClr val="accent1"/>
-          </a:fillRef>
-          <a:effectRef idx="0">
-            <a:schemeClr val="accent1"/>
-          </a:effectRef>
-          <a:fontRef idx="minor">
-            <a:schemeClr val="lt1"/>
-          </a:fontRef>
-        </p:style>
-        <p:txBody>
-          <a:bodyPr wrap="square" lIns="76200" tIns="38100" rIns="76200" bIns="38100" rtlCol="0" anchor="ctr">
-            <a:noAutofit/>
-          </a:bodyPr>
-          <a:lstStyle/>
-          <a:p>
-            <a:pPr algn="ctr"/>
-            <a:r>
-              <a:rPr lang="es-ES" sz="900" i="1">
-                <a:solidFill>
-                  <a:srgbClr val="666666"/>
-                </a:solidFill>
-                <a:latin typeface="Arial" panose="020B0604020202020204" pitchFamily="34" charset="0"/>
-              </a:rPr>
-              <a:t>CAPTURA PENDIENTE</a:t>
-            </a:r>
-          </a:p>
-          <a:p>
-            <a:pPr algn="ctr"/>
-            <a:r>
-              <a:rPr lang="es-ES" sz="900" i="1">
-                <a:solidFill>
-                  <a:srgbClr val="666666"/>
-                </a:solidFill>
-                <a:latin typeface="Arial" panose="020B0604020202020204" pitchFamily="34" charset="0"/>
-              </a:rPr>
-              <a:t>Resultado de conversión</a:t>
-            </a:r>
-            <a:endParaRPr lang="en-US" sz="900" i="1">
-              <a:solidFill>
-                <a:srgbClr val="666666"/>
-              </a:solidFill>
-              <a:latin typeface="Arial" panose="020B0604020202020204" pitchFamily="34" charset="0"/>
-            </a:endParaRPr>
-          </a:p>
-        </p:txBody>
-      </p:sp>
-      <p:sp>
-        <p:nvSpPr>
-          <p:cNvPr id="3" name="CAPTURA PENDIENTE - Selección de magnitud y unidades">
-            <a:extLst>
-              <a:ext uri="{FF2B5EF4-FFF2-40B4-BE49-F238E27FC236}">
-                <a16:creationId xmlns:a16="http://schemas.microsoft.com/office/drawing/2014/main" id="{E4CAECE9-3FFC-4C88-A4D5-375779427E2C}"/>
-              </a:ext>
-            </a:extLst>
-          </p:cNvPr>
-          <p:cNvSpPr/>
+      </p:pic>
+      <p:pic>
+        <p:nvPicPr>
+          <p:cNvPr id="260" name="image31.png"/>
+          <p:cNvPicPr/>
           <p:nvPr/>
-        </p:nvSpPr>
+        </p:nvPicPr>
+        <p:blipFill>
+          <a:blip r:embed="rId4"/>
+          <a:srcRect/>
+          <a:stretch>
+            <a:fillRect/>
+          </a:stretch>
+        </p:blipFill>
         <p:spPr>
           <a:xfrm>
             <a:off x="3227647" y="3004463"/>
@@ -20900,80 +20685,26 @@
           <a:prstGeom prst="rect">
             <a:avLst/>
           </a:prstGeom>
-          <a:solidFill>
-            <a:srgbClr val="FFFFFF"/>
-          </a:solidFill>
-          <a:ln w="15875">
+          <a:ln w="12700">
             <a:solidFill>
-              <a:srgbClr val="D9D9D9"/>
+              <a:srgbClr val="CCCCCC"/>
             </a:solidFill>
           </a:ln>
         </p:spPr>
-        <p:style>
-          <a:lnRef idx="2">
-            <a:schemeClr val="accent1">
-              <a:shade val="50000"/>
-            </a:schemeClr>
-          </a:lnRef>
-          <a:fillRef idx="1">
-            <a:schemeClr val="accent1"/>
-          </a:fillRef>
-          <a:effectRef idx="0">
-            <a:schemeClr val="accent1"/>
-          </a:effectRef>
-          <a:fontRef idx="minor">
-            <a:schemeClr val="lt1"/>
-          </a:fontRef>
-        </p:style>
-        <p:txBody>
-          <a:bodyPr wrap="square" lIns="76200" tIns="38100" rIns="76200" bIns="38100" rtlCol="0" anchor="ctr">
-            <a:noAutofit/>
-          </a:bodyPr>
-          <a:lstStyle/>
-          <a:p>
-            <a:pPr algn="ctr"/>
-            <a:r>
-              <a:rPr lang="es-ES" sz="900" i="1">
-                <a:solidFill>
-                  <a:srgbClr val="666666"/>
-                </a:solidFill>
-                <a:latin typeface="Arial" panose="020B0604020202020204" pitchFamily="34" charset="0"/>
-              </a:rPr>
-              <a:t>CAPTURA PENDIENTE</a:t>
-            </a:r>
-          </a:p>
-          <a:p>
-            <a:pPr algn="ctr"/>
-            <a:r>
-              <a:rPr lang="es-ES" sz="900" i="1">
-                <a:solidFill>
-                  <a:srgbClr val="666666"/>
-                </a:solidFill>
-                <a:latin typeface="Arial" panose="020B0604020202020204" pitchFamily="34" charset="0"/>
-              </a:rPr>
-              <a:t>Selección de magnitud y unidades</a:t>
-            </a:r>
-            <a:endParaRPr lang="en-US" sz="900" i="1">
-              <a:solidFill>
-                <a:srgbClr val="666666"/>
-              </a:solidFill>
-              <a:latin typeface="Arial" panose="020B0604020202020204" pitchFamily="34" charset="0"/>
-            </a:endParaRPr>
-          </a:p>
-        </p:txBody>
-      </p:sp>
-      <p:sp>
-        <p:nvSpPr>
-          <p:cNvPr id="4" name="CAPTURA PENDIENTE - Autenticación correcta">
-            <a:extLst>
-              <a:ext uri="{FF2B5EF4-FFF2-40B4-BE49-F238E27FC236}">
-                <a16:creationId xmlns:a16="http://schemas.microsoft.com/office/drawing/2014/main" id="{3A66B1A8-66BC-4834-9397-19290233A0F8}"/>
-              </a:ext>
-            </a:extLst>
-          </p:cNvPr>
-          <p:cNvSpPr/>
+      </p:pic>
+      <p:pic>
+        <p:nvPicPr>
+          <p:cNvPr id="261" name="image32.png"/>
+          <p:cNvPicPr/>
           <p:nvPr/>
-        </p:nvSpPr>
+        </p:nvPicPr>
+        <p:blipFill>
+          <a:blip r:embed="rId5"/>
+          <a:srcRect/>
+          <a:stretch>
+            <a:fillRect/>
+          </a:stretch>
+        </p:blipFill>
         <p:spPr>
           <a:xfrm>
             <a:off x="311657" y="3004463"/>
@@ -20982,74 +20713,26 @@
           <a:prstGeom prst="rect">
             <a:avLst/>
           </a:prstGeom>
-          <a:solidFill>
-            <a:srgbClr val="FFFFFF"/>
-          </a:solidFill>
-          <a:ln w="15875">
+          <a:ln w="12700">
             <a:solidFill>
-              <a:srgbClr val="D9D9D9"/>
+              <a:srgbClr val="CCCCCC"/>
             </a:solidFill>
           </a:ln>
         </p:spPr>
-        <p:style>
-          <a:lnRef idx="2">
-            <a:schemeClr val="accent1">
-              <a:shade val="50000"/>
-            </a:schemeClr>
-          </a:lnRef>
-          <a:fillRef idx="1">
-            <a:schemeClr val="accent1"/>
-          </a:fillRef>
-          <a:effectRef idx="0">
-            <a:schemeClr val="accent1"/>
-          </a:effectRef>
-          <a:fontRef idx="minor">
-            <a:schemeClr val="lt1"/>
-          </a:fontRef>
-        </p:style>
-        <p:txBody>
-          <a:bodyPr wrap="square" lIns="76200" tIns="38100" rIns="76200" bIns="38100" rtlCol="0" anchor="ctr">
-            <a:noAutofit/>
-          </a:bodyPr>
-          <a:lstStyle/>
-          <a:p>
-            <a:pPr algn="ctr"/>
-            <a:r>
-              <a:rPr lang="en-US" sz="900" i="1">
-                <a:solidFill>
-                  <a:srgbClr val="666666"/>
-                </a:solidFill>
-                <a:latin typeface="Arial" panose="020B0604020202020204" pitchFamily="34" charset="0"/>
-              </a:rPr>
-              <a:t>CAPTURA PENDIENTE</a:t>
-            </a:r>
-          </a:p>
-          <a:p>
-            <a:pPr algn="ctr"/>
-            <a:r>
-              <a:rPr lang="en-US" sz="900" i="1">
-                <a:solidFill>
-                  <a:srgbClr val="666666"/>
-                </a:solidFill>
-                <a:latin typeface="Arial" panose="020B0604020202020204" pitchFamily="34" charset="0"/>
-              </a:rPr>
-              <a:t>Autenticación correcta</a:t>
-            </a:r>
-          </a:p>
-        </p:txBody>
-      </p:sp>
-      <p:sp>
-        <p:nvSpPr>
-          <p:cNvPr id="5" name="CAPTURA PENDIENTE - Inicio del cliente">
-            <a:extLst>
-              <a:ext uri="{FF2B5EF4-FFF2-40B4-BE49-F238E27FC236}">
-                <a16:creationId xmlns:a16="http://schemas.microsoft.com/office/drawing/2014/main" id="{177E390A-90F6-42BA-A0CF-1B58A0837155}"/>
-              </a:ext>
-            </a:extLst>
-          </p:cNvPr>
-          <p:cNvSpPr/>
+      </p:pic>
+      <p:pic>
+        <p:nvPicPr>
+          <p:cNvPr id="262" name="image33.png"/>
+          <p:cNvPicPr/>
           <p:nvPr/>
-        </p:nvSpPr>
+        </p:nvPicPr>
+        <p:blipFill>
+          <a:blip r:embed="rId6"/>
+          <a:srcRect/>
+          <a:stretch>
+            <a:fillRect/>
+          </a:stretch>
+        </p:blipFill>
         <p:spPr>
           <a:xfrm>
             <a:off x="3227647" y="1933668"/>
@@ -21058,62 +20741,13 @@
           <a:prstGeom prst="rect">
             <a:avLst/>
           </a:prstGeom>
-          <a:solidFill>
-            <a:srgbClr val="FFFFFF"/>
-          </a:solidFill>
-          <a:ln w="15875">
+          <a:ln w="12700">
             <a:solidFill>
-              <a:srgbClr val="D9D9D9"/>
+              <a:srgbClr val="CCCCCC"/>
             </a:solidFill>
           </a:ln>
         </p:spPr>
-        <p:style>
-          <a:lnRef idx="2">
-            <a:schemeClr val="accent1">
-              <a:shade val="50000"/>
-            </a:schemeClr>
-          </a:lnRef>
-          <a:fillRef idx="1">
-            <a:schemeClr val="accent1"/>
-          </a:fillRef>
-          <a:effectRef idx="0">
-            <a:schemeClr val="accent1"/>
-          </a:effectRef>
-          <a:fontRef idx="minor">
-            <a:schemeClr val="lt1"/>
-          </a:fontRef>
-        </p:style>
-        <p:txBody>
-          <a:bodyPr wrap="square" lIns="76200" tIns="38100" rIns="76200" bIns="38100" rtlCol="0" anchor="ctr">
-            <a:noAutofit/>
-          </a:bodyPr>
-          <a:lstStyle/>
-          <a:p>
-            <a:pPr algn="ctr"/>
-            <a:r>
-              <a:rPr lang="en-US" sz="900" i="1">
-                <a:solidFill>
-                  <a:srgbClr val="666666"/>
-                </a:solidFill>
-                <a:latin typeface="Arial" panose="020B0604020202020204" pitchFamily="34" charset="0"/>
-              </a:rPr>
-              <a:t>CAPTURA PENDIENTE</a:t>
-            </a:r>
-          </a:p>
-          <a:p>
-            <a:pPr algn="ctr"/>
-            <a:r>
-              <a:rPr lang="en-US" sz="900" i="1">
-                <a:solidFill>
-                  <a:srgbClr val="666666"/>
-                </a:solidFill>
-                <a:latin typeface="Arial" panose="020B0604020202020204" pitchFamily="34" charset="0"/>
-              </a:rPr>
-              <a:t>Inicio del cliente</a:t>
-            </a:r>
-          </a:p>
-        </p:txBody>
-      </p:sp>
+      </p:pic>
     </p:spTree>
   </p:cSld>
   <p:clrMapOvr>
@@ -21748,18 +21382,19 @@
           </a:p>
         </p:txBody>
       </p:sp>
-      <p:sp>
-        <p:nvSpPr>
-          <p:cNvPr id="2" name="CAPTURA PENDIENTE - Creación del proyecto de escritorio Java">
-            <a:extLst>
-              <a:ext uri="{FF2B5EF4-FFF2-40B4-BE49-F238E27FC236}">
-                <a16:creationId xmlns:a16="http://schemas.microsoft.com/office/drawing/2014/main" id="{663269E7-24D7-4AA2-A226-27FB469FF3D9}"/>
-              </a:ext>
-            </a:extLst>
-          </p:cNvPr>
-          <p:cNvSpPr/>
+      <p:pic>
+        <p:nvPicPr>
+          <p:cNvPr id="270" name="image34.png"/>
+          <p:cNvPicPr/>
           <p:nvPr/>
-        </p:nvSpPr>
+        </p:nvPicPr>
+        <p:blipFill>
+          <a:blip r:embed="rId3"/>
+          <a:srcRect/>
+          <a:stretch>
+            <a:fillRect/>
+          </a:stretch>
+        </p:blipFill>
         <p:spPr>
           <a:xfrm>
             <a:off x="2544819" y="3270983"/>
@@ -21768,68 +21403,13 @@
           <a:prstGeom prst="rect">
             <a:avLst/>
           </a:prstGeom>
-          <a:solidFill>
-            <a:srgbClr val="FFFFFF"/>
-          </a:solidFill>
-          <a:ln w="15875">
+          <a:ln w="12700">
             <a:solidFill>
-              <a:srgbClr val="D9D9D9"/>
+              <a:srgbClr val="CCCCCC"/>
             </a:solidFill>
           </a:ln>
         </p:spPr>
-        <p:style>
-          <a:lnRef idx="2">
-            <a:schemeClr val="accent1">
-              <a:shade val="50000"/>
-            </a:schemeClr>
-          </a:lnRef>
-          <a:fillRef idx="1">
-            <a:schemeClr val="accent1"/>
-          </a:fillRef>
-          <a:effectRef idx="0">
-            <a:schemeClr val="accent1"/>
-          </a:effectRef>
-          <a:fontRef idx="minor">
-            <a:schemeClr val="lt1"/>
-          </a:fontRef>
-        </p:style>
-        <p:txBody>
-          <a:bodyPr wrap="square" lIns="76200" tIns="38100" rIns="76200" bIns="38100" rtlCol="0" anchor="ctr">
-            <a:noAutofit/>
-          </a:bodyPr>
-          <a:lstStyle/>
-          <a:p>
-            <a:pPr algn="ctr"/>
-            <a:r>
-              <a:rPr lang="es-ES" sz="900" i="1">
-                <a:solidFill>
-                  <a:srgbClr val="666666"/>
-                </a:solidFill>
-                <a:latin typeface="Arial" panose="020B0604020202020204" pitchFamily="34" charset="0"/>
-              </a:rPr>
-              <a:t>CAPTURA PENDIENTE</a:t>
-            </a:r>
-          </a:p>
-          <a:p>
-            <a:pPr algn="ctr"/>
-            <a:r>
-              <a:rPr lang="es-ES" sz="900" i="1">
-                <a:solidFill>
-                  <a:srgbClr val="666666"/>
-                </a:solidFill>
-                <a:latin typeface="Arial" panose="020B0604020202020204" pitchFamily="34" charset="0"/>
-              </a:rPr>
-              <a:t>Creación del proyecto de escritorio Java</a:t>
-            </a:r>
-            <a:endParaRPr lang="en-US" sz="900" i="1">
-              <a:solidFill>
-                <a:srgbClr val="666666"/>
-              </a:solidFill>
-              <a:latin typeface="Arial" panose="020B0604020202020204" pitchFamily="34" charset="0"/>
-            </a:endParaRPr>
-          </a:p>
-        </p:txBody>
-      </p:sp>
+      </p:pic>
     </p:spTree>
   </p:cSld>
   <p:clrMapOvr>
@@ -22520,18 +22100,19 @@
           </a:p>
         </p:txBody>
       </p:sp>
-      <p:sp>
-        <p:nvSpPr>
-          <p:cNvPr id="2" name="CAPTURA PENDIENTE - Clases del cliente de escritorio">
-            <a:extLst>
-              <a:ext uri="{FF2B5EF4-FFF2-40B4-BE49-F238E27FC236}">
-                <a16:creationId xmlns:a16="http://schemas.microsoft.com/office/drawing/2014/main" id="{3E48AA06-D457-4923-9F04-A4D9C744287E}"/>
-              </a:ext>
-            </a:extLst>
-          </p:cNvPr>
-          <p:cNvSpPr/>
+      <p:pic>
+        <p:nvPicPr>
+          <p:cNvPr id="303" name="image35.png"/>
+          <p:cNvPicPr/>
           <p:nvPr/>
-        </p:nvSpPr>
+        </p:nvPicPr>
+        <p:blipFill>
+          <a:blip r:embed="rId3"/>
+          <a:srcRect/>
+          <a:stretch>
+            <a:fillRect/>
+          </a:stretch>
+        </p:blipFill>
         <p:spPr>
           <a:xfrm>
             <a:off x="2474259" y="4377212"/>
@@ -22540,80 +22121,26 @@
           <a:prstGeom prst="rect">
             <a:avLst/>
           </a:prstGeom>
-          <a:solidFill>
-            <a:srgbClr val="FFFFFF"/>
-          </a:solidFill>
-          <a:ln w="15875">
+          <a:ln w="12700">
             <a:solidFill>
-              <a:srgbClr val="D9D9D9"/>
+              <a:srgbClr val="CCCCCC"/>
             </a:solidFill>
           </a:ln>
         </p:spPr>
-        <p:style>
-          <a:lnRef idx="2">
-            <a:schemeClr val="accent1">
-              <a:shade val="50000"/>
-            </a:schemeClr>
-          </a:lnRef>
-          <a:fillRef idx="1">
-            <a:schemeClr val="accent1"/>
-          </a:fillRef>
-          <a:effectRef idx="0">
-            <a:schemeClr val="accent1"/>
-          </a:effectRef>
-          <a:fontRef idx="minor">
-            <a:schemeClr val="lt1"/>
-          </a:fontRef>
-        </p:style>
-        <p:txBody>
-          <a:bodyPr wrap="square" lIns="76200" tIns="38100" rIns="76200" bIns="38100" rtlCol="0" anchor="ctr">
-            <a:noAutofit/>
-          </a:bodyPr>
-          <a:lstStyle/>
-          <a:p>
-            <a:pPr algn="ctr"/>
-            <a:r>
-              <a:rPr lang="es-ES" sz="900" i="1">
-                <a:solidFill>
-                  <a:srgbClr val="666666"/>
-                </a:solidFill>
-                <a:latin typeface="Arial" panose="020B0604020202020204" pitchFamily="34" charset="0"/>
-              </a:rPr>
-              <a:t>CAPTURA PENDIENTE</a:t>
-            </a:r>
-          </a:p>
-          <a:p>
-            <a:pPr algn="ctr"/>
-            <a:r>
-              <a:rPr lang="es-ES" sz="900" i="1">
-                <a:solidFill>
-                  <a:srgbClr val="666666"/>
-                </a:solidFill>
-                <a:latin typeface="Arial" panose="020B0604020202020204" pitchFamily="34" charset="0"/>
-              </a:rPr>
-              <a:t>Clases del cliente de escritorio</a:t>
-            </a:r>
-            <a:endParaRPr lang="en-US" sz="900" i="1">
-              <a:solidFill>
-                <a:srgbClr val="666666"/>
-              </a:solidFill>
-              <a:latin typeface="Arial" panose="020B0604020202020204" pitchFamily="34" charset="0"/>
-            </a:endParaRPr>
-          </a:p>
-        </p:txBody>
-      </p:sp>
-      <p:sp>
-        <p:nvSpPr>
-          <p:cNvPr id="3" name="CAPTURA PENDIENTE - Código de controlador">
-            <a:extLst>
-              <a:ext uri="{FF2B5EF4-FFF2-40B4-BE49-F238E27FC236}">
-                <a16:creationId xmlns:a16="http://schemas.microsoft.com/office/drawing/2014/main" id="{43BF684B-EF2E-4949-AFE7-D0BD1F0D762A}"/>
-              </a:ext>
-            </a:extLst>
-          </p:cNvPr>
-          <p:cNvSpPr/>
+      </p:pic>
+      <p:pic>
+        <p:nvPicPr>
+          <p:cNvPr id="304" name="image36.png"/>
+          <p:cNvPicPr/>
           <p:nvPr/>
-        </p:nvSpPr>
+        </p:nvPicPr>
+        <p:blipFill>
+          <a:blip r:embed="rId4"/>
+          <a:srcRect/>
+          <a:stretch>
+            <a:fillRect/>
+          </a:stretch>
+        </p:blipFill>
         <p:spPr>
           <a:xfrm>
             <a:off x="5925023" y="3893361"/>
@@ -22622,80 +22149,26 @@
           <a:prstGeom prst="rect">
             <a:avLst/>
           </a:prstGeom>
-          <a:solidFill>
-            <a:srgbClr val="FFFFFF"/>
-          </a:solidFill>
-          <a:ln w="15875">
+          <a:ln w="12700">
             <a:solidFill>
-              <a:srgbClr val="D9D9D9"/>
+              <a:srgbClr val="CCCCCC"/>
             </a:solidFill>
           </a:ln>
         </p:spPr>
-        <p:style>
-          <a:lnRef idx="2">
-            <a:schemeClr val="accent1">
-              <a:shade val="50000"/>
-            </a:schemeClr>
-          </a:lnRef>
-          <a:fillRef idx="1">
-            <a:schemeClr val="accent1"/>
-          </a:fillRef>
-          <a:effectRef idx="0">
-            <a:schemeClr val="accent1"/>
-          </a:effectRef>
-          <a:fontRef idx="minor">
-            <a:schemeClr val="lt1"/>
-          </a:fontRef>
-        </p:style>
-        <p:txBody>
-          <a:bodyPr wrap="square" lIns="76200" tIns="38100" rIns="76200" bIns="38100" rtlCol="0" anchor="ctr">
-            <a:noAutofit/>
-          </a:bodyPr>
-          <a:lstStyle/>
-          <a:p>
-            <a:pPr algn="ctr"/>
-            <a:r>
-              <a:rPr lang="pt-BR" sz="900" i="1">
-                <a:solidFill>
-                  <a:srgbClr val="666666"/>
-                </a:solidFill>
-                <a:latin typeface="Arial" panose="020B0604020202020204" pitchFamily="34" charset="0"/>
-              </a:rPr>
-              <a:t>CAPTURA PENDIENTE</a:t>
-            </a:r>
-          </a:p>
-          <a:p>
-            <a:pPr algn="ctr"/>
-            <a:r>
-              <a:rPr lang="pt-BR" sz="900" i="1">
-                <a:solidFill>
-                  <a:srgbClr val="666666"/>
-                </a:solidFill>
-                <a:latin typeface="Arial" panose="020B0604020202020204" pitchFamily="34" charset="0"/>
-              </a:rPr>
-              <a:t>Código de controlador</a:t>
-            </a:r>
-            <a:endParaRPr lang="en-US" sz="900" i="1">
-              <a:solidFill>
-                <a:srgbClr val="666666"/>
-              </a:solidFill>
-              <a:latin typeface="Arial" panose="020B0604020202020204" pitchFamily="34" charset="0"/>
-            </a:endParaRPr>
-          </a:p>
-        </p:txBody>
-      </p:sp>
-      <p:sp>
-        <p:nvSpPr>
-          <p:cNvPr id="4" name="CAPTURA PENDIENTE - Código de modelo">
-            <a:extLst>
-              <a:ext uri="{FF2B5EF4-FFF2-40B4-BE49-F238E27FC236}">
-                <a16:creationId xmlns:a16="http://schemas.microsoft.com/office/drawing/2014/main" id="{111AEBB2-3286-4EF1-88DC-095C99C56314}"/>
-              </a:ext>
-            </a:extLst>
-          </p:cNvPr>
-          <p:cNvSpPr/>
+      </p:pic>
+      <p:pic>
+        <p:nvPicPr>
+          <p:cNvPr id="305" name="image37.png"/>
+          <p:cNvPicPr/>
           <p:nvPr/>
-        </p:nvSpPr>
+        </p:nvPicPr>
+        <p:blipFill>
+          <a:blip r:embed="rId5"/>
+          <a:srcRect/>
+          <a:stretch>
+            <a:fillRect/>
+          </a:stretch>
+        </p:blipFill>
         <p:spPr>
           <a:xfrm>
             <a:off x="2611811" y="3836431"/>
@@ -22704,80 +22177,26 @@
           <a:prstGeom prst="rect">
             <a:avLst/>
           </a:prstGeom>
-          <a:solidFill>
-            <a:srgbClr val="FFFFFF"/>
-          </a:solidFill>
-          <a:ln w="15875">
+          <a:ln w="12700">
             <a:solidFill>
-              <a:srgbClr val="D9D9D9"/>
+              <a:srgbClr val="CCCCCC"/>
             </a:solidFill>
           </a:ln>
         </p:spPr>
-        <p:style>
-          <a:lnRef idx="2">
-            <a:schemeClr val="accent1">
-              <a:shade val="50000"/>
-            </a:schemeClr>
-          </a:lnRef>
-          <a:fillRef idx="1">
-            <a:schemeClr val="accent1"/>
-          </a:fillRef>
-          <a:effectRef idx="0">
-            <a:schemeClr val="accent1"/>
-          </a:effectRef>
-          <a:fontRef idx="minor">
-            <a:schemeClr val="lt1"/>
-          </a:fontRef>
-        </p:style>
-        <p:txBody>
-          <a:bodyPr wrap="square" lIns="76200" tIns="38100" rIns="76200" bIns="38100" rtlCol="0" anchor="ctr">
-            <a:noAutofit/>
-          </a:bodyPr>
-          <a:lstStyle/>
-          <a:p>
-            <a:pPr algn="ctr"/>
-            <a:r>
-              <a:rPr lang="pt-BR" sz="900" i="1">
-                <a:solidFill>
-                  <a:srgbClr val="666666"/>
-                </a:solidFill>
-                <a:latin typeface="Arial" panose="020B0604020202020204" pitchFamily="34" charset="0"/>
-              </a:rPr>
-              <a:t>CAPTURA PENDIENTE</a:t>
-            </a:r>
-          </a:p>
-          <a:p>
-            <a:pPr algn="ctr"/>
-            <a:r>
-              <a:rPr lang="pt-BR" sz="900" i="1">
-                <a:solidFill>
-                  <a:srgbClr val="666666"/>
-                </a:solidFill>
-                <a:latin typeface="Arial" panose="020B0604020202020204" pitchFamily="34" charset="0"/>
-              </a:rPr>
-              <a:t>Código de modelo</a:t>
-            </a:r>
-            <a:endParaRPr lang="en-US" sz="900" i="1">
-              <a:solidFill>
-                <a:srgbClr val="666666"/>
-              </a:solidFill>
-              <a:latin typeface="Arial" panose="020B0604020202020204" pitchFamily="34" charset="0"/>
-            </a:endParaRPr>
-          </a:p>
-        </p:txBody>
-      </p:sp>
-      <p:sp>
-        <p:nvSpPr>
-          <p:cNvPr id="5" name="CAPTURA PENDIENTE - Estructura de paquetes MVC">
-            <a:extLst>
-              <a:ext uri="{FF2B5EF4-FFF2-40B4-BE49-F238E27FC236}">
-                <a16:creationId xmlns:a16="http://schemas.microsoft.com/office/drawing/2014/main" id="{BFE6003C-75DA-45A6-B0A3-DFE0CFC4C742}"/>
-              </a:ext>
-            </a:extLst>
-          </p:cNvPr>
-          <p:cNvSpPr/>
+      </p:pic>
+      <p:pic>
+        <p:nvPicPr>
+          <p:cNvPr id="306" name="image34.png"/>
+          <p:cNvPicPr/>
           <p:nvPr/>
-        </p:nvSpPr>
+        </p:nvPicPr>
+        <p:blipFill>
+          <a:blip r:embed="rId6"/>
+          <a:srcRect/>
+          <a:stretch>
+            <a:fillRect/>
+          </a:stretch>
+        </p:blipFill>
         <p:spPr>
           <a:xfrm>
             <a:off x="5088311" y="2609850"/>
@@ -22786,62 +22205,13 @@
           <a:prstGeom prst="rect">
             <a:avLst/>
           </a:prstGeom>
-          <a:solidFill>
-            <a:srgbClr val="FFFFFF"/>
-          </a:solidFill>
-          <a:ln w="15875">
+          <a:ln w="12700">
             <a:solidFill>
-              <a:srgbClr val="D9D9D9"/>
+              <a:srgbClr val="CCCCCC"/>
             </a:solidFill>
           </a:ln>
         </p:spPr>
-        <p:style>
-          <a:lnRef idx="2">
-            <a:schemeClr val="accent1">
-              <a:shade val="50000"/>
-            </a:schemeClr>
-          </a:lnRef>
-          <a:fillRef idx="1">
-            <a:schemeClr val="accent1"/>
-          </a:fillRef>
-          <a:effectRef idx="0">
-            <a:schemeClr val="accent1"/>
-          </a:effectRef>
-          <a:fontRef idx="minor">
-            <a:schemeClr val="lt1"/>
-          </a:fontRef>
-        </p:style>
-        <p:txBody>
-          <a:bodyPr wrap="square" lIns="76200" tIns="38100" rIns="76200" bIns="38100" rtlCol="0" anchor="ctr">
-            <a:noAutofit/>
-          </a:bodyPr>
-          <a:lstStyle/>
-          <a:p>
-            <a:pPr algn="ctr"/>
-            <a:r>
-              <a:rPr lang="en-US" sz="900" i="1">
-                <a:solidFill>
-                  <a:srgbClr val="666666"/>
-                </a:solidFill>
-                <a:latin typeface="Arial" panose="020B0604020202020204" pitchFamily="34" charset="0"/>
-              </a:rPr>
-              <a:t>CAPTURA PENDIENTE</a:t>
-            </a:r>
-          </a:p>
-          <a:p>
-            <a:pPr algn="ctr"/>
-            <a:r>
-              <a:rPr lang="en-US" sz="900" i="1">
-                <a:solidFill>
-                  <a:srgbClr val="666666"/>
-                </a:solidFill>
-                <a:latin typeface="Arial" panose="020B0604020202020204" pitchFamily="34" charset="0"/>
-              </a:rPr>
-              <a:t>Estructura de paquetes MVC</a:t>
-            </a:r>
-          </a:p>
-        </p:txBody>
-      </p:sp>
+      </p:pic>
     </p:spTree>
   </p:cSld>
   <p:clrMapOvr>
@@ -23431,18 +22801,19 @@
           </a:p>
         </p:txBody>
       </p:sp>
-      <p:sp>
-        <p:nvSpPr>
-          <p:cNvPr id="2" name="CAPTURA PENDIENTE - Interfaz Swing de autenticación y conversión">
-            <a:extLst>
-              <a:ext uri="{FF2B5EF4-FFF2-40B4-BE49-F238E27FC236}">
-                <a16:creationId xmlns:a16="http://schemas.microsoft.com/office/drawing/2014/main" id="{FD6BCCEA-27B7-4124-B944-480E5C1E86BF}"/>
-              </a:ext>
-            </a:extLst>
-          </p:cNvPr>
-          <p:cNvSpPr/>
+      <p:pic>
+        <p:nvPicPr>
+          <p:cNvPr id="311" name="image37.png"/>
+          <p:cNvPicPr/>
           <p:nvPr/>
-        </p:nvSpPr>
+        </p:nvPicPr>
+        <p:blipFill>
+          <a:blip r:embed="rId3"/>
+          <a:srcRect/>
+          <a:stretch>
+            <a:fillRect/>
+          </a:stretch>
+        </p:blipFill>
         <p:spPr>
           <a:xfrm>
             <a:off x="699248" y="2831802"/>
@@ -23451,68 +22822,13 @@
           <a:prstGeom prst="rect">
             <a:avLst/>
           </a:prstGeom>
-          <a:solidFill>
-            <a:srgbClr val="FFFFFF"/>
-          </a:solidFill>
-          <a:ln w="15875">
+          <a:ln w="12700">
             <a:solidFill>
-              <a:srgbClr val="D9D9D9"/>
+              <a:srgbClr val="CCCCCC"/>
             </a:solidFill>
           </a:ln>
         </p:spPr>
-        <p:style>
-          <a:lnRef idx="2">
-            <a:schemeClr val="accent1">
-              <a:shade val="50000"/>
-            </a:schemeClr>
-          </a:lnRef>
-          <a:fillRef idx="1">
-            <a:schemeClr val="accent1"/>
-          </a:fillRef>
-          <a:effectRef idx="0">
-            <a:schemeClr val="accent1"/>
-          </a:effectRef>
-          <a:fontRef idx="minor">
-            <a:schemeClr val="lt1"/>
-          </a:fontRef>
-        </p:style>
-        <p:txBody>
-          <a:bodyPr wrap="square" lIns="76200" tIns="38100" rIns="76200" bIns="38100" rtlCol="0" anchor="ctr">
-            <a:noAutofit/>
-          </a:bodyPr>
-          <a:lstStyle/>
-          <a:p>
-            <a:pPr algn="ctr"/>
-            <a:r>
-              <a:rPr lang="es-ES" sz="900" i="1">
-                <a:solidFill>
-                  <a:srgbClr val="666666"/>
-                </a:solidFill>
-                <a:latin typeface="Arial" panose="020B0604020202020204" pitchFamily="34" charset="0"/>
-              </a:rPr>
-              <a:t>CAPTURA PENDIENTE</a:t>
-            </a:r>
-          </a:p>
-          <a:p>
-            <a:pPr algn="ctr"/>
-            <a:r>
-              <a:rPr lang="es-ES" sz="900" i="1">
-                <a:solidFill>
-                  <a:srgbClr val="666666"/>
-                </a:solidFill>
-                <a:latin typeface="Arial" panose="020B0604020202020204" pitchFamily="34" charset="0"/>
-              </a:rPr>
-              <a:t>Interfaz Swing de autenticación y conversión</a:t>
-            </a:r>
-            <a:endParaRPr lang="en-US" sz="900" i="1">
-              <a:solidFill>
-                <a:srgbClr val="666666"/>
-              </a:solidFill>
-              <a:latin typeface="Arial" panose="020B0604020202020204" pitchFamily="34" charset="0"/>
-            </a:endParaRPr>
-          </a:p>
-        </p:txBody>
-      </p:sp>
+      </p:pic>
     </p:spTree>
   </p:cSld>
   <p:clrMapOvr>
@@ -24102,18 +23418,19 @@
           </a:p>
         </p:txBody>
       </p:sp>
-      <p:sp>
-        <p:nvSpPr>
-          <p:cNvPr id="2" name="CAPTURA PENDIENTE - Pantalla de inicio de sesión del escritorio">
-            <a:extLst>
-              <a:ext uri="{FF2B5EF4-FFF2-40B4-BE49-F238E27FC236}">
-                <a16:creationId xmlns:a16="http://schemas.microsoft.com/office/drawing/2014/main" id="{091CA7AD-0B4C-4DD1-82AB-5CD1430BF9D4}"/>
-              </a:ext>
-            </a:extLst>
-          </p:cNvPr>
-          <p:cNvSpPr/>
+      <p:pic>
+        <p:nvPicPr>
+          <p:cNvPr id="319" name="image38.png"/>
+          <p:cNvPicPr/>
           <p:nvPr/>
-        </p:nvSpPr>
+        </p:nvPicPr>
+        <p:blipFill>
+          <a:blip r:embed="rId3"/>
+          <a:srcRect/>
+          <a:stretch>
+            <a:fillRect/>
+          </a:stretch>
+        </p:blipFill>
         <p:spPr>
           <a:xfrm>
             <a:off x="581192" y="2329030"/>
@@ -24122,68 +23439,13 @@
           <a:prstGeom prst="rect">
             <a:avLst/>
           </a:prstGeom>
-          <a:solidFill>
-            <a:srgbClr val="FFFFFF"/>
-          </a:solidFill>
-          <a:ln w="15875">
+          <a:ln w="12700">
             <a:solidFill>
-              <a:srgbClr val="D9D9D9"/>
+              <a:srgbClr val="CCCCCC"/>
             </a:solidFill>
           </a:ln>
         </p:spPr>
-        <p:style>
-          <a:lnRef idx="2">
-            <a:schemeClr val="accent1">
-              <a:shade val="50000"/>
-            </a:schemeClr>
-          </a:lnRef>
-          <a:fillRef idx="1">
-            <a:schemeClr val="accent1"/>
-          </a:fillRef>
-          <a:effectRef idx="0">
-            <a:schemeClr val="accent1"/>
-          </a:effectRef>
-          <a:fontRef idx="minor">
-            <a:schemeClr val="lt1"/>
-          </a:fontRef>
-        </p:style>
-        <p:txBody>
-          <a:bodyPr wrap="square" lIns="76200" tIns="38100" rIns="76200" bIns="38100" rtlCol="0" anchor="ctr">
-            <a:noAutofit/>
-          </a:bodyPr>
-          <a:lstStyle/>
-          <a:p>
-            <a:pPr algn="ctr"/>
-            <a:r>
-              <a:rPr lang="es-ES" sz="900" i="1">
-                <a:solidFill>
-                  <a:srgbClr val="666666"/>
-                </a:solidFill>
-                <a:latin typeface="Arial" panose="020B0604020202020204" pitchFamily="34" charset="0"/>
-              </a:rPr>
-              <a:t>CAPTURA PENDIENTE</a:t>
-            </a:r>
-          </a:p>
-          <a:p>
-            <a:pPr algn="ctr"/>
-            <a:r>
-              <a:rPr lang="es-ES" sz="900" i="1">
-                <a:solidFill>
-                  <a:srgbClr val="666666"/>
-                </a:solidFill>
-                <a:latin typeface="Arial" panose="020B0604020202020204" pitchFamily="34" charset="0"/>
-              </a:rPr>
-              <a:t>Pantalla de inicio de sesión del escritorio</a:t>
-            </a:r>
-            <a:endParaRPr lang="en-US" sz="900" i="1">
-              <a:solidFill>
-                <a:srgbClr val="666666"/>
-              </a:solidFill>
-              <a:latin typeface="Arial" panose="020B0604020202020204" pitchFamily="34" charset="0"/>
-            </a:endParaRPr>
-          </a:p>
-        </p:txBody>
-      </p:sp>
+      </p:pic>
     </p:spTree>
   </p:cSld>
   <p:clrMapOvr>
@@ -24773,18 +24035,19 @@
           </a:p>
         </p:txBody>
       </p:sp>
-      <p:sp>
-        <p:nvSpPr>
-          <p:cNvPr id="2" name="CAPTURA PENDIENTE - Formulario de conversión del escritorio">
-            <a:extLst>
-              <a:ext uri="{FF2B5EF4-FFF2-40B4-BE49-F238E27FC236}">
-                <a16:creationId xmlns:a16="http://schemas.microsoft.com/office/drawing/2014/main" id="{8127F732-C93D-4E2A-B778-8E58DD31545F}"/>
-              </a:ext>
-            </a:extLst>
-          </p:cNvPr>
-          <p:cNvSpPr/>
+      <p:pic>
+        <p:nvPicPr>
+          <p:cNvPr id="337" name="image39.png"/>
+          <p:cNvPicPr/>
           <p:nvPr/>
-        </p:nvSpPr>
+        </p:nvPicPr>
+        <p:blipFill>
+          <a:blip r:embed="rId3"/>
+          <a:srcRect/>
+          <a:stretch>
+            <a:fillRect/>
+          </a:stretch>
+        </p:blipFill>
         <p:spPr>
           <a:xfrm>
             <a:off x="1131103" y="2513572"/>
@@ -24793,68 +24056,13 @@
           <a:prstGeom prst="rect">
             <a:avLst/>
           </a:prstGeom>
-          <a:solidFill>
-            <a:srgbClr val="FFFFFF"/>
-          </a:solidFill>
-          <a:ln w="15875">
+          <a:ln w="12700">
             <a:solidFill>
-              <a:srgbClr val="D9D9D9"/>
+              <a:srgbClr val="CCCCCC"/>
             </a:solidFill>
           </a:ln>
         </p:spPr>
-        <p:style>
-          <a:lnRef idx="2">
-            <a:schemeClr val="accent1">
-              <a:shade val="50000"/>
-            </a:schemeClr>
-          </a:lnRef>
-          <a:fillRef idx="1">
-            <a:schemeClr val="accent1"/>
-          </a:fillRef>
-          <a:effectRef idx="0">
-            <a:schemeClr val="accent1"/>
-          </a:effectRef>
-          <a:fontRef idx="minor">
-            <a:schemeClr val="lt1"/>
-          </a:fontRef>
-        </p:style>
-        <p:txBody>
-          <a:bodyPr wrap="square" lIns="76200" tIns="38100" rIns="76200" bIns="38100" rtlCol="0" anchor="ctr">
-            <a:noAutofit/>
-          </a:bodyPr>
-          <a:lstStyle/>
-          <a:p>
-            <a:pPr algn="ctr"/>
-            <a:r>
-              <a:rPr lang="es-ES" sz="900" i="1">
-                <a:solidFill>
-                  <a:srgbClr val="666666"/>
-                </a:solidFill>
-                <a:latin typeface="Arial" panose="020B0604020202020204" pitchFamily="34" charset="0"/>
-              </a:rPr>
-              <a:t>CAPTURA PENDIENTE</a:t>
-            </a:r>
-          </a:p>
-          <a:p>
-            <a:pPr algn="ctr"/>
-            <a:r>
-              <a:rPr lang="es-ES" sz="900" i="1">
-                <a:solidFill>
-                  <a:srgbClr val="666666"/>
-                </a:solidFill>
-                <a:latin typeface="Arial" panose="020B0604020202020204" pitchFamily="34" charset="0"/>
-              </a:rPr>
-              <a:t>Formulario de conversión del escritorio</a:t>
-            </a:r>
-            <a:endParaRPr lang="en-US" sz="900" i="1">
-              <a:solidFill>
-                <a:srgbClr val="666666"/>
-              </a:solidFill>
-              <a:latin typeface="Arial" panose="020B0604020202020204" pitchFamily="34" charset="0"/>
-            </a:endParaRPr>
-          </a:p>
-        </p:txBody>
-      </p:sp>
+      </p:pic>
     </p:spTree>
   </p:cSld>
   <p:clrMapOvr>
@@ -25509,18 +24717,19 @@
           </a:p>
         </p:txBody>
       </p:sp>
-      <p:sp>
-        <p:nvSpPr>
-          <p:cNvPr id="2" name="CAPTURA PENDIENTE - Configuración de Jetty y Servlets">
-            <a:extLst>
-              <a:ext uri="{FF2B5EF4-FFF2-40B4-BE49-F238E27FC236}">
-                <a16:creationId xmlns:a16="http://schemas.microsoft.com/office/drawing/2014/main" id="{1ED333B1-B57A-47DA-B5B8-5256D401FF3B}"/>
-              </a:ext>
-            </a:extLst>
-          </p:cNvPr>
-          <p:cNvSpPr/>
+      <p:pic>
+        <p:nvPicPr>
+          <p:cNvPr id="345" name="image40.png"/>
+          <p:cNvPicPr/>
           <p:nvPr/>
-        </p:nvSpPr>
+        </p:nvPicPr>
+        <p:blipFill>
+          <a:blip r:embed="rId3"/>
+          <a:srcRect/>
+          <a:stretch>
+            <a:fillRect/>
+          </a:stretch>
+        </p:blipFill>
         <p:spPr>
           <a:xfrm>
             <a:off x="3863999" y="3524211"/>
@@ -25529,80 +24738,26 @@
           <a:prstGeom prst="rect">
             <a:avLst/>
           </a:prstGeom>
-          <a:solidFill>
-            <a:srgbClr val="FFFFFF"/>
-          </a:solidFill>
-          <a:ln w="15875">
+          <a:ln w="12700">
             <a:solidFill>
-              <a:srgbClr val="D9D9D9"/>
+              <a:srgbClr val="CCCCCC"/>
             </a:solidFill>
           </a:ln>
         </p:spPr>
-        <p:style>
-          <a:lnRef idx="2">
-            <a:schemeClr val="accent1">
-              <a:shade val="50000"/>
-            </a:schemeClr>
-          </a:lnRef>
-          <a:fillRef idx="1">
-            <a:schemeClr val="accent1"/>
-          </a:fillRef>
-          <a:effectRef idx="0">
-            <a:schemeClr val="accent1"/>
-          </a:effectRef>
-          <a:fontRef idx="minor">
-            <a:schemeClr val="lt1"/>
-          </a:fontRef>
-        </p:style>
-        <p:txBody>
-          <a:bodyPr wrap="square" lIns="76200" tIns="38100" rIns="76200" bIns="38100" rtlCol="0" anchor="ctr">
-            <a:noAutofit/>
-          </a:bodyPr>
-          <a:lstStyle/>
-          <a:p>
-            <a:pPr algn="ctr"/>
-            <a:r>
-              <a:rPr lang="es-ES" sz="900" i="1">
-                <a:solidFill>
-                  <a:srgbClr val="666666"/>
-                </a:solidFill>
-                <a:latin typeface="Arial" panose="020B0604020202020204" pitchFamily="34" charset="0"/>
-              </a:rPr>
-              <a:t>CAPTURA PENDIENTE</a:t>
-            </a:r>
-          </a:p>
-          <a:p>
-            <a:pPr algn="ctr"/>
-            <a:r>
-              <a:rPr lang="es-ES" sz="900" i="1">
-                <a:solidFill>
-                  <a:srgbClr val="666666"/>
-                </a:solidFill>
-                <a:latin typeface="Arial" panose="020B0604020202020204" pitchFamily="34" charset="0"/>
-              </a:rPr>
-              <a:t>Configuración de Jetty y Servlets</a:t>
-            </a:r>
-            <a:endParaRPr lang="en-US" sz="900" i="1">
-              <a:solidFill>
-                <a:srgbClr val="666666"/>
-              </a:solidFill>
-              <a:latin typeface="Arial" panose="020B0604020202020204" pitchFamily="34" charset="0"/>
-            </a:endParaRPr>
-          </a:p>
-        </p:txBody>
-      </p:sp>
-      <p:sp>
-        <p:nvSpPr>
-          <p:cNvPr id="3" name="CAPTURA PENDIENTE - Estructura del cliente web">
-            <a:extLst>
-              <a:ext uri="{FF2B5EF4-FFF2-40B4-BE49-F238E27FC236}">
-                <a16:creationId xmlns:a16="http://schemas.microsoft.com/office/drawing/2014/main" id="{D4EC0DD7-0BA2-43B1-9C3E-B21DA267F73A}"/>
-              </a:ext>
-            </a:extLst>
-          </p:cNvPr>
-          <p:cNvSpPr/>
+      </p:pic>
+      <p:pic>
+        <p:nvPicPr>
+          <p:cNvPr id="346" name="image41.png"/>
+          <p:cNvPicPr/>
           <p:nvPr/>
-        </p:nvSpPr>
+        </p:nvPicPr>
+        <p:blipFill>
+          <a:blip r:embed="rId4"/>
+          <a:srcRect/>
+          <a:stretch>
+            <a:fillRect/>
+          </a:stretch>
+        </p:blipFill>
         <p:spPr>
           <a:xfrm>
             <a:off x="1211356" y="3839056"/>
@@ -25611,68 +24766,13 @@
           <a:prstGeom prst="rect">
             <a:avLst/>
           </a:prstGeom>
-          <a:solidFill>
-            <a:srgbClr val="FFFFFF"/>
-          </a:solidFill>
-          <a:ln w="15875">
+          <a:ln w="12700">
             <a:solidFill>
-              <a:srgbClr val="D9D9D9"/>
+              <a:srgbClr val="CCCCCC"/>
             </a:solidFill>
           </a:ln>
         </p:spPr>
-        <p:style>
-          <a:lnRef idx="2">
-            <a:schemeClr val="accent1">
-              <a:shade val="50000"/>
-            </a:schemeClr>
-          </a:lnRef>
-          <a:fillRef idx="1">
-            <a:schemeClr val="accent1"/>
-          </a:fillRef>
-          <a:effectRef idx="0">
-            <a:schemeClr val="accent1"/>
-          </a:effectRef>
-          <a:fontRef idx="minor">
-            <a:schemeClr val="lt1"/>
-          </a:fontRef>
-        </p:style>
-        <p:txBody>
-          <a:bodyPr wrap="square" lIns="76200" tIns="38100" rIns="76200" bIns="38100" rtlCol="0" anchor="ctr">
-            <a:noAutofit/>
-          </a:bodyPr>
-          <a:lstStyle/>
-          <a:p>
-            <a:pPr algn="ctr"/>
-            <a:r>
-              <a:rPr lang="es-ES" sz="900" i="1">
-                <a:solidFill>
-                  <a:srgbClr val="666666"/>
-                </a:solidFill>
-                <a:latin typeface="Arial" panose="020B0604020202020204" pitchFamily="34" charset="0"/>
-              </a:rPr>
-              <a:t>CAPTURA PENDIENTE</a:t>
-            </a:r>
-          </a:p>
-          <a:p>
-            <a:pPr algn="ctr"/>
-            <a:r>
-              <a:rPr lang="es-ES" sz="900" i="1">
-                <a:solidFill>
-                  <a:srgbClr val="666666"/>
-                </a:solidFill>
-                <a:latin typeface="Arial" panose="020B0604020202020204" pitchFamily="34" charset="0"/>
-              </a:rPr>
-              <a:t>Estructura del cliente web</a:t>
-            </a:r>
-            <a:endParaRPr lang="en-US" sz="900" i="1">
-              <a:solidFill>
-                <a:srgbClr val="666666"/>
-              </a:solidFill>
-              <a:latin typeface="Arial" panose="020B0604020202020204" pitchFamily="34" charset="0"/>
-            </a:endParaRPr>
-          </a:p>
-        </p:txBody>
-      </p:sp>
+      </p:pic>
     </p:spTree>
   </p:cSld>
   <p:clrMapOvr>
@@ -26310,18 +25410,19 @@
           </a:p>
         </p:txBody>
       </p:sp>
-      <p:sp>
-        <p:nvSpPr>
-          <p:cNvPr id="2" name="CAPTURA PENDIENTE - Formulario y respuesta del cliente web">
-            <a:extLst>
-              <a:ext uri="{FF2B5EF4-FFF2-40B4-BE49-F238E27FC236}">
-                <a16:creationId xmlns:a16="http://schemas.microsoft.com/office/drawing/2014/main" id="{50F1EE2D-3E68-4D94-93CB-4966AFFED2EE}"/>
-              </a:ext>
-            </a:extLst>
-          </p:cNvPr>
-          <p:cNvSpPr/>
+      <p:pic>
+        <p:nvPicPr>
+          <p:cNvPr id="379" name="image42.png"/>
+          <p:cNvPicPr/>
           <p:nvPr/>
-        </p:nvSpPr>
+        </p:nvPicPr>
+        <p:blipFill>
+          <a:blip r:embed="rId3"/>
+          <a:srcRect/>
+          <a:stretch>
+            <a:fillRect/>
+          </a:stretch>
+        </p:blipFill>
         <p:spPr>
           <a:xfrm>
             <a:off x="3679277" y="3132944"/>
@@ -26330,80 +25431,26 @@
           <a:prstGeom prst="rect">
             <a:avLst/>
           </a:prstGeom>
-          <a:solidFill>
-            <a:srgbClr val="FFFFFF"/>
-          </a:solidFill>
-          <a:ln w="15875">
+          <a:ln w="12700">
             <a:solidFill>
-              <a:srgbClr val="D9D9D9"/>
+              <a:srgbClr val="CCCCCC"/>
             </a:solidFill>
           </a:ln>
         </p:spPr>
-        <p:style>
-          <a:lnRef idx="2">
-            <a:schemeClr val="accent1">
-              <a:shade val="50000"/>
-            </a:schemeClr>
-          </a:lnRef>
-          <a:fillRef idx="1">
-            <a:schemeClr val="accent1"/>
-          </a:fillRef>
-          <a:effectRef idx="0">
-            <a:schemeClr val="accent1"/>
-          </a:effectRef>
-          <a:fontRef idx="minor">
-            <a:schemeClr val="lt1"/>
-          </a:fontRef>
-        </p:style>
-        <p:txBody>
-          <a:bodyPr wrap="square" lIns="76200" tIns="38100" rIns="76200" bIns="38100" rtlCol="0" anchor="ctr">
-            <a:noAutofit/>
-          </a:bodyPr>
-          <a:lstStyle/>
-          <a:p>
-            <a:pPr algn="ctr"/>
-            <a:r>
-              <a:rPr lang="es-ES" sz="900" i="1">
-                <a:solidFill>
-                  <a:srgbClr val="666666"/>
-                </a:solidFill>
-                <a:latin typeface="Arial" panose="020B0604020202020204" pitchFamily="34" charset="0"/>
-              </a:rPr>
-              <a:t>CAPTURA PENDIENTE</a:t>
-            </a:r>
-          </a:p>
-          <a:p>
-            <a:pPr algn="ctr"/>
-            <a:r>
-              <a:rPr lang="es-ES" sz="900" i="1">
-                <a:solidFill>
-                  <a:srgbClr val="666666"/>
-                </a:solidFill>
-                <a:latin typeface="Arial" panose="020B0604020202020204" pitchFamily="34" charset="0"/>
-              </a:rPr>
-              <a:t>Formulario y respuesta del cliente web</a:t>
-            </a:r>
-            <a:endParaRPr lang="en-US" sz="900" i="1">
-              <a:solidFill>
-                <a:srgbClr val="666666"/>
-              </a:solidFill>
-              <a:latin typeface="Arial" panose="020B0604020202020204" pitchFamily="34" charset="0"/>
-            </a:endParaRPr>
-          </a:p>
-        </p:txBody>
-      </p:sp>
-      <p:sp>
-        <p:nvSpPr>
-          <p:cNvPr id="4" name="CAPTURA PENDIENTE - Pantalla web de conversión">
-            <a:extLst>
-              <a:ext uri="{FF2B5EF4-FFF2-40B4-BE49-F238E27FC236}">
-                <a16:creationId xmlns:a16="http://schemas.microsoft.com/office/drawing/2014/main" id="{5324AC23-B32E-46E5-90FD-3A5E7DF924FA}"/>
-              </a:ext>
-            </a:extLst>
-          </p:cNvPr>
-          <p:cNvSpPr/>
+      </p:pic>
+      <p:pic>
+        <p:nvPicPr>
+          <p:cNvPr id="380" name="image44.png"/>
+          <p:cNvPicPr/>
           <p:nvPr/>
-        </p:nvSpPr>
+        </p:nvPicPr>
+        <p:blipFill>
+          <a:blip r:embed="rId4"/>
+          <a:srcRect/>
+          <a:stretch>
+            <a:fillRect/>
+          </a:stretch>
+        </p:blipFill>
         <p:spPr>
           <a:xfrm>
             <a:off x="841168" y="3132944"/>
@@ -26412,68 +25459,13 @@
           <a:prstGeom prst="rect">
             <a:avLst/>
           </a:prstGeom>
-          <a:solidFill>
-            <a:srgbClr val="FFFFFF"/>
-          </a:solidFill>
-          <a:ln w="15875">
+          <a:ln w="12700">
             <a:solidFill>
-              <a:srgbClr val="D9D9D9"/>
+              <a:srgbClr val="CCCCCC"/>
             </a:solidFill>
           </a:ln>
         </p:spPr>
-        <p:style>
-          <a:lnRef idx="2">
-            <a:schemeClr val="accent1">
-              <a:shade val="50000"/>
-            </a:schemeClr>
-          </a:lnRef>
-          <a:fillRef idx="1">
-            <a:schemeClr val="accent1"/>
-          </a:fillRef>
-          <a:effectRef idx="0">
-            <a:schemeClr val="accent1"/>
-          </a:effectRef>
-          <a:fontRef idx="minor">
-            <a:schemeClr val="lt1"/>
-          </a:fontRef>
-        </p:style>
-        <p:txBody>
-          <a:bodyPr wrap="square" lIns="76200" tIns="38100" rIns="76200" bIns="38100" rtlCol="0" anchor="ctr">
-            <a:noAutofit/>
-          </a:bodyPr>
-          <a:lstStyle/>
-          <a:p>
-            <a:pPr algn="ctr"/>
-            <a:r>
-              <a:rPr lang="es-ES" sz="900" i="1">
-                <a:solidFill>
-                  <a:srgbClr val="666666"/>
-                </a:solidFill>
-                <a:latin typeface="Arial" panose="020B0604020202020204" pitchFamily="34" charset="0"/>
-              </a:rPr>
-              <a:t>CAPTURA PENDIENTE</a:t>
-            </a:r>
-          </a:p>
-          <a:p>
-            <a:pPr algn="ctr"/>
-            <a:r>
-              <a:rPr lang="es-ES" sz="900" i="1">
-                <a:solidFill>
-                  <a:srgbClr val="666666"/>
-                </a:solidFill>
-                <a:latin typeface="Arial" panose="020B0604020202020204" pitchFamily="34" charset="0"/>
-              </a:rPr>
-              <a:t>Pantalla web de conversión</a:t>
-            </a:r>
-            <a:endParaRPr lang="en-US" sz="900" i="1">
-              <a:solidFill>
-                <a:srgbClr val="666666"/>
-              </a:solidFill>
-              <a:latin typeface="Arial" panose="020B0604020202020204" pitchFamily="34" charset="0"/>
-            </a:endParaRPr>
-          </a:p>
-        </p:txBody>
-      </p:sp>
+      </p:pic>
     </p:spTree>
   </p:cSld>
   <p:clrMapOvr>
@@ -27540,18 +26532,19 @@
           </a:p>
         </p:txBody>
       </p:sp>
-      <p:sp>
-        <p:nvSpPr>
-          <p:cNvPr id="2" name="CAPTURA PENDIENTE - Pantalla web de inicio de sesión">
-            <a:extLst>
-              <a:ext uri="{FF2B5EF4-FFF2-40B4-BE49-F238E27FC236}">
-                <a16:creationId xmlns:a16="http://schemas.microsoft.com/office/drawing/2014/main" id="{3F838D8B-14B2-4CD8-9567-BA215EFD5B81}"/>
-              </a:ext>
-            </a:extLst>
-          </p:cNvPr>
-          <p:cNvSpPr/>
+      <p:pic>
+        <p:nvPicPr>
+          <p:cNvPr id="387" name="image43.png"/>
+          <p:cNvPicPr/>
           <p:nvPr/>
-        </p:nvSpPr>
+        </p:nvPicPr>
+        <p:blipFill>
+          <a:blip r:embed="rId3"/>
+          <a:srcRect/>
+          <a:stretch>
+            <a:fillRect/>
+          </a:stretch>
+        </p:blipFill>
         <p:spPr>
           <a:xfrm>
             <a:off x="2804070" y="2850777"/>
@@ -27560,68 +26553,13 @@
           <a:prstGeom prst="rect">
             <a:avLst/>
           </a:prstGeom>
-          <a:solidFill>
-            <a:srgbClr val="FFFFFF"/>
-          </a:solidFill>
-          <a:ln w="15875">
+          <a:ln w="12700">
             <a:solidFill>
-              <a:srgbClr val="D9D9D9"/>
+              <a:srgbClr val="CCCCCC"/>
             </a:solidFill>
           </a:ln>
         </p:spPr>
-        <p:style>
-          <a:lnRef idx="2">
-            <a:schemeClr val="accent1">
-              <a:shade val="50000"/>
-            </a:schemeClr>
-          </a:lnRef>
-          <a:fillRef idx="1">
-            <a:schemeClr val="accent1"/>
-          </a:fillRef>
-          <a:effectRef idx="0">
-            <a:schemeClr val="accent1"/>
-          </a:effectRef>
-          <a:fontRef idx="minor">
-            <a:schemeClr val="lt1"/>
-          </a:fontRef>
-        </p:style>
-        <p:txBody>
-          <a:bodyPr wrap="square" lIns="76200" tIns="38100" rIns="76200" bIns="38100" rtlCol="0" anchor="ctr">
-            <a:noAutofit/>
-          </a:bodyPr>
-          <a:lstStyle/>
-          <a:p>
-            <a:pPr algn="ctr"/>
-            <a:r>
-              <a:rPr lang="es-ES" sz="900" i="1">
-                <a:solidFill>
-                  <a:srgbClr val="666666"/>
-                </a:solidFill>
-                <a:latin typeface="Arial" panose="020B0604020202020204" pitchFamily="34" charset="0"/>
-              </a:rPr>
-              <a:t>CAPTURA PENDIENTE</a:t>
-            </a:r>
-          </a:p>
-          <a:p>
-            <a:pPr algn="ctr"/>
-            <a:r>
-              <a:rPr lang="es-ES" sz="900" i="1">
-                <a:solidFill>
-                  <a:srgbClr val="666666"/>
-                </a:solidFill>
-                <a:latin typeface="Arial" panose="020B0604020202020204" pitchFamily="34" charset="0"/>
-              </a:rPr>
-              <a:t>Pantalla web de inicio de sesión</a:t>
-            </a:r>
-            <a:endParaRPr lang="en-US" sz="900" i="1">
-              <a:solidFill>
-                <a:srgbClr val="666666"/>
-              </a:solidFill>
-              <a:latin typeface="Arial" panose="020B0604020202020204" pitchFamily="34" charset="0"/>
-            </a:endParaRPr>
-          </a:p>
-        </p:txBody>
-      </p:sp>
+      </p:pic>
     </p:spTree>
   </p:cSld>
   <p:clrMapOvr>
@@ -28212,18 +27150,19 @@
           </a:p>
         </p:txBody>
       </p:sp>
-      <p:sp>
-        <p:nvSpPr>
-          <p:cNvPr id="2" name="CAPTURA PENDIENTE - Cliente web ejecutándose en el navegador">
-            <a:extLst>
-              <a:ext uri="{FF2B5EF4-FFF2-40B4-BE49-F238E27FC236}">
-                <a16:creationId xmlns:a16="http://schemas.microsoft.com/office/drawing/2014/main" id="{3BC82B9D-141E-4A6F-B487-EA586761DCF3}"/>
-              </a:ext>
-            </a:extLst>
-          </p:cNvPr>
-          <p:cNvSpPr/>
+      <p:pic>
+        <p:nvPicPr>
+          <p:cNvPr id="403" name="image44.png"/>
+          <p:cNvPicPr/>
           <p:nvPr/>
-        </p:nvSpPr>
+        </p:nvPicPr>
+        <p:blipFill>
+          <a:blip r:embed="rId3"/>
+          <a:srcRect/>
+          <a:stretch>
+            <a:fillRect/>
+          </a:stretch>
+        </p:blipFill>
         <p:spPr>
           <a:xfrm>
             <a:off x="3135268" y="3257334"/>
@@ -28232,68 +27171,13 @@
           <a:prstGeom prst="rect">
             <a:avLst/>
           </a:prstGeom>
-          <a:solidFill>
-            <a:srgbClr val="FFFFFF"/>
-          </a:solidFill>
-          <a:ln w="15875">
+          <a:ln w="12700">
             <a:solidFill>
-              <a:srgbClr val="D9D9D9"/>
+              <a:srgbClr val="CCCCCC"/>
             </a:solidFill>
           </a:ln>
         </p:spPr>
-        <p:style>
-          <a:lnRef idx="2">
-            <a:schemeClr val="accent1">
-              <a:shade val="50000"/>
-            </a:schemeClr>
-          </a:lnRef>
-          <a:fillRef idx="1">
-            <a:schemeClr val="accent1"/>
-          </a:fillRef>
-          <a:effectRef idx="0">
-            <a:schemeClr val="accent1"/>
-          </a:effectRef>
-          <a:fontRef idx="minor">
-            <a:schemeClr val="lt1"/>
-          </a:fontRef>
-        </p:style>
-        <p:txBody>
-          <a:bodyPr wrap="square" lIns="76200" tIns="38100" rIns="76200" bIns="38100" rtlCol="0" anchor="ctr">
-            <a:noAutofit/>
-          </a:bodyPr>
-          <a:lstStyle/>
-          <a:p>
-            <a:pPr algn="ctr"/>
-            <a:r>
-              <a:rPr lang="es-ES" sz="900" i="1">
-                <a:solidFill>
-                  <a:srgbClr val="666666"/>
-                </a:solidFill>
-                <a:latin typeface="Arial" panose="020B0604020202020204" pitchFamily="34" charset="0"/>
-              </a:rPr>
-              <a:t>CAPTURA PENDIENTE</a:t>
-            </a:r>
-          </a:p>
-          <a:p>
-            <a:pPr algn="ctr"/>
-            <a:r>
-              <a:rPr lang="es-ES" sz="900" i="1">
-                <a:solidFill>
-                  <a:srgbClr val="666666"/>
-                </a:solidFill>
-                <a:latin typeface="Arial" panose="020B0604020202020204" pitchFamily="34" charset="0"/>
-              </a:rPr>
-              <a:t>Cliente web ejecutándose en el navegador</a:t>
-            </a:r>
-            <a:endParaRPr lang="en-US" sz="900" i="1">
-              <a:solidFill>
-                <a:srgbClr val="666666"/>
-              </a:solidFill>
-              <a:latin typeface="Arial" panose="020B0604020202020204" pitchFamily="34" charset="0"/>
-            </a:endParaRPr>
-          </a:p>
-        </p:txBody>
-      </p:sp>
+      </p:pic>
     </p:spTree>
   </p:cSld>
   <p:clrMapOvr>
@@ -28884,18 +27768,19 @@
           </a:p>
         </p:txBody>
       </p:sp>
-      <p:sp>
-        <p:nvSpPr>
-          <p:cNvPr id="2" name="CAPTURA PENDIENTE - Autenticación en el cliente web">
-            <a:extLst>
-              <a:ext uri="{FF2B5EF4-FFF2-40B4-BE49-F238E27FC236}">
-                <a16:creationId xmlns:a16="http://schemas.microsoft.com/office/drawing/2014/main" id="{C394E801-C15E-45DC-B260-08AA3ABADAE5}"/>
-              </a:ext>
-            </a:extLst>
-          </p:cNvPr>
-          <p:cNvSpPr/>
+      <p:pic>
+        <p:nvPicPr>
+          <p:cNvPr id="413" name="image43.png"/>
+          <p:cNvPicPr/>
           <p:nvPr/>
-        </p:nvSpPr>
+        </p:nvPicPr>
+        <p:blipFill>
+          <a:blip r:embed="rId3"/>
+          <a:srcRect/>
+          <a:stretch>
+            <a:fillRect/>
+          </a:stretch>
+        </p:blipFill>
         <p:spPr>
           <a:xfrm>
             <a:off x="803359" y="2804085"/>
@@ -28904,68 +27789,13 @@
           <a:prstGeom prst="rect">
             <a:avLst/>
           </a:prstGeom>
-          <a:solidFill>
-            <a:srgbClr val="FFFFFF"/>
-          </a:solidFill>
-          <a:ln w="15875">
+          <a:ln w="12700">
             <a:solidFill>
-              <a:srgbClr val="D9D9D9"/>
+              <a:srgbClr val="CCCCCC"/>
             </a:solidFill>
           </a:ln>
         </p:spPr>
-        <p:style>
-          <a:lnRef idx="2">
-            <a:schemeClr val="accent1">
-              <a:shade val="50000"/>
-            </a:schemeClr>
-          </a:lnRef>
-          <a:fillRef idx="1">
-            <a:schemeClr val="accent1"/>
-          </a:fillRef>
-          <a:effectRef idx="0">
-            <a:schemeClr val="accent1"/>
-          </a:effectRef>
-          <a:fontRef idx="minor">
-            <a:schemeClr val="lt1"/>
-          </a:fontRef>
-        </p:style>
-        <p:txBody>
-          <a:bodyPr wrap="square" lIns="76200" tIns="38100" rIns="76200" bIns="38100" rtlCol="0" anchor="ctr">
-            <a:noAutofit/>
-          </a:bodyPr>
-          <a:lstStyle/>
-          <a:p>
-            <a:pPr algn="ctr"/>
-            <a:r>
-              <a:rPr lang="es-ES" sz="900" i="1">
-                <a:solidFill>
-                  <a:srgbClr val="666666"/>
-                </a:solidFill>
-                <a:latin typeface="Arial" panose="020B0604020202020204" pitchFamily="34" charset="0"/>
-              </a:rPr>
-              <a:t>CAPTURA PENDIENTE</a:t>
-            </a:r>
-          </a:p>
-          <a:p>
-            <a:pPr algn="ctr"/>
-            <a:r>
-              <a:rPr lang="es-ES" sz="900" i="1">
-                <a:solidFill>
-                  <a:srgbClr val="666666"/>
-                </a:solidFill>
-                <a:latin typeface="Arial" panose="020B0604020202020204" pitchFamily="34" charset="0"/>
-              </a:rPr>
-              <a:t>Autenticación en el cliente web</a:t>
-            </a:r>
-            <a:endParaRPr lang="en-US" sz="900" i="1">
-              <a:solidFill>
-                <a:srgbClr val="666666"/>
-              </a:solidFill>
-              <a:latin typeface="Arial" panose="020B0604020202020204" pitchFamily="34" charset="0"/>
-            </a:endParaRPr>
-          </a:p>
-        </p:txBody>
-      </p:sp>
+      </p:pic>
     </p:spTree>
   </p:cSld>
   <p:clrMapOvr>
@@ -29555,18 +28385,19 @@
           </a:p>
         </p:txBody>
       </p:sp>
-      <p:sp>
-        <p:nvSpPr>
-          <p:cNvPr id="2" name="CAPTURA PENDIENTE - Conversión realizada desde el cliente web">
-            <a:extLst>
-              <a:ext uri="{FF2B5EF4-FFF2-40B4-BE49-F238E27FC236}">
-                <a16:creationId xmlns:a16="http://schemas.microsoft.com/office/drawing/2014/main" id="{9BC455B7-E39D-443C-87AE-7A64222F6181}"/>
-              </a:ext>
-            </a:extLst>
-          </p:cNvPr>
-          <p:cNvSpPr/>
+      <p:pic>
+        <p:nvPicPr>
+          <p:cNvPr id="421" name="image44.png"/>
+          <p:cNvPicPr/>
           <p:nvPr/>
-        </p:nvSpPr>
+        </p:nvPicPr>
+        <p:blipFill>
+          <a:blip r:embed="rId3"/>
+          <a:srcRect/>
+          <a:stretch>
+            <a:fillRect/>
+          </a:stretch>
+        </p:blipFill>
         <p:spPr>
           <a:xfrm>
             <a:off x="3686896" y="2718547"/>
@@ -29575,68 +28406,13 @@
           <a:prstGeom prst="rect">
             <a:avLst/>
           </a:prstGeom>
-          <a:solidFill>
-            <a:srgbClr val="FFFFFF"/>
-          </a:solidFill>
-          <a:ln w="15875">
+          <a:ln w="12700">
             <a:solidFill>
-              <a:srgbClr val="D9D9D9"/>
+              <a:srgbClr val="CCCCCC"/>
             </a:solidFill>
           </a:ln>
         </p:spPr>
-        <p:style>
-          <a:lnRef idx="2">
-            <a:schemeClr val="accent1">
-              <a:shade val="50000"/>
-            </a:schemeClr>
-          </a:lnRef>
-          <a:fillRef idx="1">
-            <a:schemeClr val="accent1"/>
-          </a:fillRef>
-          <a:effectRef idx="0">
-            <a:schemeClr val="accent1"/>
-          </a:effectRef>
-          <a:fontRef idx="minor">
-            <a:schemeClr val="lt1"/>
-          </a:fontRef>
-        </p:style>
-        <p:txBody>
-          <a:bodyPr wrap="square" lIns="76200" tIns="38100" rIns="76200" bIns="38100" rtlCol="0" anchor="ctr">
-            <a:noAutofit/>
-          </a:bodyPr>
-          <a:lstStyle/>
-          <a:p>
-            <a:pPr algn="ctr"/>
-            <a:r>
-              <a:rPr lang="es-ES" sz="900" i="1">
-                <a:solidFill>
-                  <a:srgbClr val="666666"/>
-                </a:solidFill>
-                <a:latin typeface="Arial" panose="020B0604020202020204" pitchFamily="34" charset="0"/>
-              </a:rPr>
-              <a:t>CAPTURA PENDIENTE</a:t>
-            </a:r>
-          </a:p>
-          <a:p>
-            <a:pPr algn="ctr"/>
-            <a:r>
-              <a:rPr lang="es-ES" sz="900" i="1">
-                <a:solidFill>
-                  <a:srgbClr val="666666"/>
-                </a:solidFill>
-                <a:latin typeface="Arial" panose="020B0604020202020204" pitchFamily="34" charset="0"/>
-              </a:rPr>
-              <a:t>Conversión realizada desde el cliente web</a:t>
-            </a:r>
-            <a:endParaRPr lang="en-US" sz="900" i="1">
-              <a:solidFill>
-                <a:srgbClr val="666666"/>
-              </a:solidFill>
-              <a:latin typeface="Arial" panose="020B0604020202020204" pitchFamily="34" charset="0"/>
-            </a:endParaRPr>
-          </a:p>
-        </p:txBody>
-      </p:sp>
+      </p:pic>
     </p:spTree>
   </p:cSld>
   <p:clrMapOvr>
@@ -30316,18 +29092,19 @@
           </a:p>
         </p:txBody>
       </p:sp>
-      <p:sp>
-        <p:nvSpPr>
-          <p:cNvPr id="2" name="CAPTURA PENDIENTE - Configuración del proyecto y dependencia cliente">
-            <a:extLst>
-              <a:ext uri="{FF2B5EF4-FFF2-40B4-BE49-F238E27FC236}">
-                <a16:creationId xmlns:a16="http://schemas.microsoft.com/office/drawing/2014/main" id="{50C86C09-A255-49F6-9411-BB349FB96D6B}"/>
-              </a:ext>
-            </a:extLst>
-          </p:cNvPr>
-          <p:cNvSpPr/>
+      <p:pic>
+        <p:nvPicPr>
+          <p:cNvPr id="430" name="image45.png"/>
+          <p:cNvPicPr/>
           <p:nvPr/>
-        </p:nvSpPr>
+        </p:nvPicPr>
+        <p:blipFill>
+          <a:blip r:embed="rId3"/>
+          <a:srcRect/>
+          <a:stretch>
+            <a:fillRect/>
+          </a:stretch>
+        </p:blipFill>
         <p:spPr>
           <a:xfrm>
             <a:off x="904275" y="5528800"/>
@@ -30336,80 +29113,26 @@
           <a:prstGeom prst="rect">
             <a:avLst/>
           </a:prstGeom>
-          <a:solidFill>
-            <a:srgbClr val="FFFFFF"/>
-          </a:solidFill>
-          <a:ln w="15875">
+          <a:ln w="12700">
             <a:solidFill>
-              <a:srgbClr val="D9D9D9"/>
+              <a:srgbClr val="CCCCCC"/>
             </a:solidFill>
           </a:ln>
         </p:spPr>
-        <p:style>
-          <a:lnRef idx="2">
-            <a:schemeClr val="accent1">
-              <a:shade val="50000"/>
-            </a:schemeClr>
-          </a:lnRef>
-          <a:fillRef idx="1">
-            <a:schemeClr val="accent1"/>
-          </a:fillRef>
-          <a:effectRef idx="0">
-            <a:schemeClr val="accent1"/>
-          </a:effectRef>
-          <a:fontRef idx="minor">
-            <a:schemeClr val="lt1"/>
-          </a:fontRef>
-        </p:style>
-        <p:txBody>
-          <a:bodyPr wrap="square" lIns="76200" tIns="38100" rIns="76200" bIns="38100" rtlCol="0" anchor="ctr">
-            <a:noAutofit/>
-          </a:bodyPr>
-          <a:lstStyle/>
-          <a:p>
-            <a:pPr algn="ctr"/>
-            <a:r>
-              <a:rPr lang="es-ES" sz="900" i="1">
-                <a:solidFill>
-                  <a:srgbClr val="666666"/>
-                </a:solidFill>
-                <a:latin typeface="Arial" panose="020B0604020202020204" pitchFamily="34" charset="0"/>
-              </a:rPr>
-              <a:t>CAPTURA PENDIENTE</a:t>
-            </a:r>
-          </a:p>
-          <a:p>
-            <a:pPr algn="ctr"/>
-            <a:r>
-              <a:rPr lang="es-ES" sz="900" i="1">
-                <a:solidFill>
-                  <a:srgbClr val="666666"/>
-                </a:solidFill>
-                <a:latin typeface="Arial" panose="020B0604020202020204" pitchFamily="34" charset="0"/>
-              </a:rPr>
-              <a:t>Configuración del proyecto y dependencia cliente</a:t>
-            </a:r>
-            <a:endParaRPr lang="en-US" sz="900" i="1">
-              <a:solidFill>
-                <a:srgbClr val="666666"/>
-              </a:solidFill>
-              <a:latin typeface="Arial" panose="020B0604020202020204" pitchFamily="34" charset="0"/>
-            </a:endParaRPr>
-          </a:p>
-        </p:txBody>
-      </p:sp>
-      <p:sp>
-        <p:nvSpPr>
-          <p:cNvPr id="3" name="CAPTURA PENDIENTE - Creación de actividad Android">
-            <a:extLst>
-              <a:ext uri="{FF2B5EF4-FFF2-40B4-BE49-F238E27FC236}">
-                <a16:creationId xmlns:a16="http://schemas.microsoft.com/office/drawing/2014/main" id="{25DA522F-0895-4629-81B9-37D7BCB50BF3}"/>
-              </a:ext>
-            </a:extLst>
-          </p:cNvPr>
-          <p:cNvSpPr/>
+      </p:pic>
+      <p:pic>
+        <p:nvPicPr>
+          <p:cNvPr id="431" name="image46.png"/>
+          <p:cNvPicPr/>
           <p:nvPr/>
-        </p:nvSpPr>
+        </p:nvPicPr>
+        <p:blipFill>
+          <a:blip r:embed="rId4"/>
+          <a:srcRect/>
+          <a:stretch>
+            <a:fillRect/>
+          </a:stretch>
+        </p:blipFill>
         <p:spPr>
           <a:xfrm>
             <a:off x="5410937" y="4209124"/>
@@ -30418,80 +29141,26 @@
           <a:prstGeom prst="rect">
             <a:avLst/>
           </a:prstGeom>
-          <a:solidFill>
-            <a:srgbClr val="FFFFFF"/>
-          </a:solidFill>
-          <a:ln w="15875">
+          <a:ln w="12700">
             <a:solidFill>
-              <a:srgbClr val="D9D9D9"/>
+              <a:srgbClr val="CCCCCC"/>
             </a:solidFill>
           </a:ln>
         </p:spPr>
-        <p:style>
-          <a:lnRef idx="2">
-            <a:schemeClr val="accent1">
-              <a:shade val="50000"/>
-            </a:schemeClr>
-          </a:lnRef>
-          <a:fillRef idx="1">
-            <a:schemeClr val="accent1"/>
-          </a:fillRef>
-          <a:effectRef idx="0">
-            <a:schemeClr val="accent1"/>
-          </a:effectRef>
-          <a:fontRef idx="minor">
-            <a:schemeClr val="lt1"/>
-          </a:fontRef>
-        </p:style>
-        <p:txBody>
-          <a:bodyPr wrap="square" lIns="76200" tIns="38100" rIns="76200" bIns="38100" rtlCol="0" anchor="ctr">
-            <a:noAutofit/>
-          </a:bodyPr>
-          <a:lstStyle/>
-          <a:p>
-            <a:pPr algn="ctr"/>
-            <a:r>
-              <a:rPr lang="es-ES" sz="900" i="1">
-                <a:solidFill>
-                  <a:srgbClr val="666666"/>
-                </a:solidFill>
-                <a:latin typeface="Arial" panose="020B0604020202020204" pitchFamily="34" charset="0"/>
-              </a:rPr>
-              <a:t>CAPTURA PENDIENTE</a:t>
-            </a:r>
-          </a:p>
-          <a:p>
-            <a:pPr algn="ctr"/>
-            <a:r>
-              <a:rPr lang="es-ES" sz="900" i="1">
-                <a:solidFill>
-                  <a:srgbClr val="666666"/>
-                </a:solidFill>
-                <a:latin typeface="Arial" panose="020B0604020202020204" pitchFamily="34" charset="0"/>
-              </a:rPr>
-              <a:t>Creación de actividad Android</a:t>
-            </a:r>
-            <a:endParaRPr lang="en-US" sz="900" i="1">
-              <a:solidFill>
-                <a:srgbClr val="666666"/>
-              </a:solidFill>
-              <a:latin typeface="Arial" panose="020B0604020202020204" pitchFamily="34" charset="0"/>
-            </a:endParaRPr>
-          </a:p>
-        </p:txBody>
-      </p:sp>
-      <p:sp>
-        <p:nvSpPr>
-          <p:cNvPr id="4" name="CAPTURA PENDIENTE - Captura del módulo descrito en esta diapositiva">
-            <a:extLst>
-              <a:ext uri="{FF2B5EF4-FFF2-40B4-BE49-F238E27FC236}">
-                <a16:creationId xmlns:a16="http://schemas.microsoft.com/office/drawing/2014/main" id="{554899BC-2CDC-4865-BB5B-01E3D2D8969A}"/>
-              </a:ext>
-            </a:extLst>
-          </p:cNvPr>
-          <p:cNvSpPr/>
+      </p:pic>
+      <p:pic>
+        <p:nvPicPr>
+          <p:cNvPr id="432" name="image47.png"/>
+          <p:cNvPicPr/>
           <p:nvPr/>
-        </p:nvSpPr>
+        </p:nvPicPr>
+        <p:blipFill>
+          <a:blip r:embed="rId5"/>
+          <a:srcRect/>
+          <a:stretch>
+            <a:fillRect/>
+          </a:stretch>
+        </p:blipFill>
         <p:spPr>
           <a:xfrm>
             <a:off x="6418749" y="2402189"/>
@@ -30500,68 +29169,13 @@
           <a:prstGeom prst="rect">
             <a:avLst/>
           </a:prstGeom>
-          <a:solidFill>
-            <a:srgbClr val="FFFFFF"/>
-          </a:solidFill>
-          <a:ln w="15875">
+          <a:ln w="12700">
             <a:solidFill>
-              <a:srgbClr val="D9D9D9"/>
+              <a:srgbClr val="CCCCCC"/>
             </a:solidFill>
           </a:ln>
         </p:spPr>
-        <p:style>
-          <a:lnRef idx="2">
-            <a:schemeClr val="accent1">
-              <a:shade val="50000"/>
-            </a:schemeClr>
-          </a:lnRef>
-          <a:fillRef idx="1">
-            <a:schemeClr val="accent1"/>
-          </a:fillRef>
-          <a:effectRef idx="0">
-            <a:schemeClr val="accent1"/>
-          </a:effectRef>
-          <a:fontRef idx="minor">
-            <a:schemeClr val="lt1"/>
-          </a:fontRef>
-        </p:style>
-        <p:txBody>
-          <a:bodyPr wrap="square" lIns="76200" tIns="38100" rIns="76200" bIns="38100" rtlCol="0" anchor="ctr">
-            <a:noAutofit/>
-          </a:bodyPr>
-          <a:lstStyle/>
-          <a:p>
-            <a:pPr algn="ctr"/>
-            <a:r>
-              <a:rPr lang="es-ES" sz="900" i="1">
-                <a:solidFill>
-                  <a:srgbClr val="666666"/>
-                </a:solidFill>
-                <a:latin typeface="Arial" panose="020B0604020202020204" pitchFamily="34" charset="0"/>
-              </a:rPr>
-              <a:t>CAPTURA PENDIENTE</a:t>
-            </a:r>
-          </a:p>
-          <a:p>
-            <a:pPr algn="ctr"/>
-            <a:r>
-              <a:rPr lang="es-ES" sz="900" i="1">
-                <a:solidFill>
-                  <a:srgbClr val="666666"/>
-                </a:solidFill>
-                <a:latin typeface="Arial" panose="020B0604020202020204" pitchFamily="34" charset="0"/>
-              </a:rPr>
-              <a:t>Captura del módulo descrito en esta diapositiva</a:t>
-            </a:r>
-            <a:endParaRPr lang="en-US" sz="900" i="1">
-              <a:solidFill>
-                <a:srgbClr val="666666"/>
-              </a:solidFill>
-              <a:latin typeface="Arial" panose="020B0604020202020204" pitchFamily="34" charset="0"/>
-            </a:endParaRPr>
-          </a:p>
-        </p:txBody>
-      </p:sp>
+      </p:pic>
     </p:spTree>
   </p:cSld>
   <p:clrMapOvr>
@@ -31175,18 +29789,19 @@
           </a:p>
         </p:txBody>
       </p:sp>
-      <p:sp>
-        <p:nvSpPr>
-          <p:cNvPr id="2" name="CAPTURA PENDIENTE - Paquetes y estructura MVC de Android">
-            <a:extLst>
-              <a:ext uri="{FF2B5EF4-FFF2-40B4-BE49-F238E27FC236}">
-                <a16:creationId xmlns:a16="http://schemas.microsoft.com/office/drawing/2014/main" id="{112061D5-DCD0-40EF-968A-DFC2D04FA81D}"/>
-              </a:ext>
-            </a:extLst>
-          </p:cNvPr>
-          <p:cNvSpPr/>
+      <p:pic>
+        <p:nvPicPr>
+          <p:cNvPr id="440" name="image46.png"/>
+          <p:cNvPicPr/>
           <p:nvPr/>
-        </p:nvSpPr>
+        </p:nvPicPr>
+        <p:blipFill>
+          <a:blip r:embed="rId3"/>
+          <a:srcRect/>
+          <a:stretch>
+            <a:fillRect/>
+          </a:stretch>
+        </p:blipFill>
         <p:spPr>
           <a:xfrm>
             <a:off x="4741537" y="2559253"/>
@@ -31195,68 +29810,13 @@
           <a:prstGeom prst="rect">
             <a:avLst/>
           </a:prstGeom>
-          <a:solidFill>
-            <a:srgbClr val="FFFFFF"/>
-          </a:solidFill>
-          <a:ln w="15875">
+          <a:ln w="12700">
             <a:solidFill>
-              <a:srgbClr val="D9D9D9"/>
+              <a:srgbClr val="CCCCCC"/>
             </a:solidFill>
           </a:ln>
         </p:spPr>
-        <p:style>
-          <a:lnRef idx="2">
-            <a:schemeClr val="accent1">
-              <a:shade val="50000"/>
-            </a:schemeClr>
-          </a:lnRef>
-          <a:fillRef idx="1">
-            <a:schemeClr val="accent1"/>
-          </a:fillRef>
-          <a:effectRef idx="0">
-            <a:schemeClr val="accent1"/>
-          </a:effectRef>
-          <a:fontRef idx="minor">
-            <a:schemeClr val="lt1"/>
-          </a:fontRef>
-        </p:style>
-        <p:txBody>
-          <a:bodyPr wrap="square" lIns="76200" tIns="38100" rIns="76200" bIns="38100" rtlCol="0" anchor="ctr">
-            <a:noAutofit/>
-          </a:bodyPr>
-          <a:lstStyle/>
-          <a:p>
-            <a:pPr algn="ctr"/>
-            <a:r>
-              <a:rPr lang="es-ES" sz="900" i="1">
-                <a:solidFill>
-                  <a:srgbClr val="666666"/>
-                </a:solidFill>
-                <a:latin typeface="Arial" panose="020B0604020202020204" pitchFamily="34" charset="0"/>
-              </a:rPr>
-              <a:t>CAPTURA PENDIENTE</a:t>
-            </a:r>
-          </a:p>
-          <a:p>
-            <a:pPr algn="ctr"/>
-            <a:r>
-              <a:rPr lang="es-ES" sz="900" i="1">
-                <a:solidFill>
-                  <a:srgbClr val="666666"/>
-                </a:solidFill>
-                <a:latin typeface="Arial" panose="020B0604020202020204" pitchFamily="34" charset="0"/>
-              </a:rPr>
-              <a:t>Paquetes y estructura MVC de Android</a:t>
-            </a:r>
-            <a:endParaRPr lang="en-US" sz="900" i="1">
-              <a:solidFill>
-                <a:srgbClr val="666666"/>
-              </a:solidFill>
-              <a:latin typeface="Arial" panose="020B0604020202020204" pitchFamily="34" charset="0"/>
-            </a:endParaRPr>
-          </a:p>
-        </p:txBody>
-      </p:sp>
+      </p:pic>
     </p:spTree>
   </p:cSld>
   <p:clrMapOvr>
@@ -31954,18 +30514,19 @@
           </a:p>
         </p:txBody>
       </p:sp>
-      <p:sp>
-        <p:nvSpPr>
-          <p:cNvPr id="2" name="CAPTURA PENDIENTE - Controlador de conversión móvil">
-            <a:extLst>
-              <a:ext uri="{FF2B5EF4-FFF2-40B4-BE49-F238E27FC236}">
-                <a16:creationId xmlns:a16="http://schemas.microsoft.com/office/drawing/2014/main" id="{4B592B61-C742-4195-8165-417B6E42D4FC}"/>
-              </a:ext>
-            </a:extLst>
-          </p:cNvPr>
-          <p:cNvSpPr/>
+      <p:pic>
+        <p:nvPicPr>
+          <p:cNvPr id="449" name="image48.png"/>
+          <p:cNvPicPr/>
           <p:nvPr/>
-        </p:nvSpPr>
+        </p:nvPicPr>
+        <p:blipFill>
+          <a:blip r:embed="rId3"/>
+          <a:srcRect/>
+          <a:stretch>
+            <a:fillRect/>
+          </a:stretch>
+        </p:blipFill>
         <p:spPr>
           <a:xfrm>
             <a:off x="4980331" y="3710940"/>
@@ -31974,80 +30535,26 @@
           <a:prstGeom prst="rect">
             <a:avLst/>
           </a:prstGeom>
-          <a:solidFill>
-            <a:srgbClr val="FFFFFF"/>
-          </a:solidFill>
-          <a:ln w="15875">
+          <a:ln w="12700">
             <a:solidFill>
-              <a:srgbClr val="D9D9D9"/>
+              <a:srgbClr val="CCCCCC"/>
             </a:solidFill>
           </a:ln>
         </p:spPr>
-        <p:style>
-          <a:lnRef idx="2">
-            <a:schemeClr val="accent1">
-              <a:shade val="50000"/>
-            </a:schemeClr>
-          </a:lnRef>
-          <a:fillRef idx="1">
-            <a:schemeClr val="accent1"/>
-          </a:fillRef>
-          <a:effectRef idx="0">
-            <a:schemeClr val="accent1"/>
-          </a:effectRef>
-          <a:fontRef idx="minor">
-            <a:schemeClr val="lt1"/>
-          </a:fontRef>
-        </p:style>
-        <p:txBody>
-          <a:bodyPr wrap="square" lIns="76200" tIns="38100" rIns="76200" bIns="38100" rtlCol="0" anchor="ctr">
-            <a:noAutofit/>
-          </a:bodyPr>
-          <a:lstStyle/>
-          <a:p>
-            <a:pPr algn="ctr"/>
-            <a:r>
-              <a:rPr lang="es-ES" sz="900" i="1">
-                <a:solidFill>
-                  <a:srgbClr val="666666"/>
-                </a:solidFill>
-                <a:latin typeface="Arial" panose="020B0604020202020204" pitchFamily="34" charset="0"/>
-              </a:rPr>
-              <a:t>CAPTURA PENDIENTE</a:t>
-            </a:r>
-          </a:p>
-          <a:p>
-            <a:pPr algn="ctr"/>
-            <a:r>
-              <a:rPr lang="es-ES" sz="900" i="1">
-                <a:solidFill>
-                  <a:srgbClr val="666666"/>
-                </a:solidFill>
-                <a:latin typeface="Arial" panose="020B0604020202020204" pitchFamily="34" charset="0"/>
-              </a:rPr>
-              <a:t>Controlador de conversión móvil</a:t>
-            </a:r>
-            <a:endParaRPr lang="en-US" sz="900" i="1">
-              <a:solidFill>
-                <a:srgbClr val="666666"/>
-              </a:solidFill>
-              <a:latin typeface="Arial" panose="020B0604020202020204" pitchFamily="34" charset="0"/>
-            </a:endParaRPr>
-          </a:p>
-        </p:txBody>
-      </p:sp>
-      <p:sp>
-        <p:nvSpPr>
-          <p:cNvPr id="4" name="CAPTURA PENDIENTE - Cliente HTTP JSON del móvil">
-            <a:extLst>
-              <a:ext uri="{FF2B5EF4-FFF2-40B4-BE49-F238E27FC236}">
-                <a16:creationId xmlns:a16="http://schemas.microsoft.com/office/drawing/2014/main" id="{E833F513-8033-4416-9E1E-E4BA1533EA86}"/>
-              </a:ext>
-            </a:extLst>
-          </p:cNvPr>
-          <p:cNvSpPr/>
+      </p:pic>
+      <p:pic>
+        <p:nvPicPr>
+          <p:cNvPr id="450" name="image49.png"/>
+          <p:cNvPicPr/>
           <p:nvPr/>
-        </p:nvSpPr>
+        </p:nvPicPr>
+        <p:blipFill>
+          <a:blip r:embed="rId4"/>
+          <a:srcRect/>
+          <a:stretch>
+            <a:fillRect/>
+          </a:stretch>
+        </p:blipFill>
         <p:spPr>
           <a:xfrm>
             <a:off x="491075" y="3711388"/>
@@ -32056,62 +30563,13 @@
           <a:prstGeom prst="rect">
             <a:avLst/>
           </a:prstGeom>
-          <a:solidFill>
-            <a:srgbClr val="FFFFFF"/>
-          </a:solidFill>
-          <a:ln w="15875">
+          <a:ln w="12700">
             <a:solidFill>
-              <a:srgbClr val="D9D9D9"/>
+              <a:srgbClr val="CCCCCC"/>
             </a:solidFill>
           </a:ln>
         </p:spPr>
-        <p:style>
-          <a:lnRef idx="2">
-            <a:schemeClr val="accent1">
-              <a:shade val="50000"/>
-            </a:schemeClr>
-          </a:lnRef>
-          <a:fillRef idx="1">
-            <a:schemeClr val="accent1"/>
-          </a:fillRef>
-          <a:effectRef idx="0">
-            <a:schemeClr val="accent1"/>
-          </a:effectRef>
-          <a:fontRef idx="minor">
-            <a:schemeClr val="lt1"/>
-          </a:fontRef>
-        </p:style>
-        <p:txBody>
-          <a:bodyPr wrap="square" lIns="76200" tIns="38100" rIns="76200" bIns="38100" rtlCol="0" anchor="ctr">
-            <a:noAutofit/>
-          </a:bodyPr>
-          <a:lstStyle/>
-          <a:p>
-            <a:pPr algn="ctr"/>
-            <a:r>
-              <a:rPr lang="en-US" sz="900" i="1">
-                <a:solidFill>
-                  <a:srgbClr val="666666"/>
-                </a:solidFill>
-                <a:latin typeface="Arial" panose="020B0604020202020204" pitchFamily="34" charset="0"/>
-              </a:rPr>
-              <a:t>CAPTURA PENDIENTE</a:t>
-            </a:r>
-          </a:p>
-          <a:p>
-            <a:pPr algn="ctr"/>
-            <a:r>
-              <a:rPr lang="en-US" sz="900" i="1">
-                <a:solidFill>
-                  <a:srgbClr val="666666"/>
-                </a:solidFill>
-                <a:latin typeface="Arial" panose="020B0604020202020204" pitchFamily="34" charset="0"/>
-              </a:rPr>
-              <a:t>Cliente HTTP/JSON del móvil</a:t>
-            </a:r>
-          </a:p>
-        </p:txBody>
-      </p:sp>
+      </p:pic>
     </p:spTree>
   </p:cSld>
   <p:clrMapOvr>
@@ -32809,18 +31267,19 @@
           </a:p>
         </p:txBody>
       </p:sp>
-      <p:sp>
-        <p:nvSpPr>
-          <p:cNvPr id="2" name="CAPTURA PENDIENTE - Pantalla móvil de conversión">
-            <a:extLst>
-              <a:ext uri="{FF2B5EF4-FFF2-40B4-BE49-F238E27FC236}">
-                <a16:creationId xmlns:a16="http://schemas.microsoft.com/office/drawing/2014/main" id="{5D2BE896-C9D6-4451-8421-875BD8CFF0FD}"/>
-              </a:ext>
-            </a:extLst>
-          </p:cNvPr>
-          <p:cNvSpPr/>
+      <p:pic>
+        <p:nvPicPr>
+          <p:cNvPr id="459" name="image50.png"/>
+          <p:cNvPicPr/>
           <p:nvPr/>
-        </p:nvSpPr>
+        </p:nvPicPr>
+        <p:blipFill>
+          <a:blip r:embed="rId3"/>
+          <a:srcRect/>
+          <a:stretch>
+            <a:fillRect/>
+          </a:stretch>
+        </p:blipFill>
         <p:spPr>
           <a:xfrm>
             <a:off x="5096586" y="3395466"/>
@@ -32829,80 +31288,26 @@
           <a:prstGeom prst="rect">
             <a:avLst/>
           </a:prstGeom>
-          <a:solidFill>
-            <a:srgbClr val="FFFFFF"/>
-          </a:solidFill>
-          <a:ln w="15875">
+          <a:ln w="12700">
             <a:solidFill>
-              <a:srgbClr val="D9D9D9"/>
+              <a:srgbClr val="CCCCCC"/>
             </a:solidFill>
           </a:ln>
         </p:spPr>
-        <p:style>
-          <a:lnRef idx="2">
-            <a:schemeClr val="accent1">
-              <a:shade val="50000"/>
-            </a:schemeClr>
-          </a:lnRef>
-          <a:fillRef idx="1">
-            <a:schemeClr val="accent1"/>
-          </a:fillRef>
-          <a:effectRef idx="0">
-            <a:schemeClr val="accent1"/>
-          </a:effectRef>
-          <a:fontRef idx="minor">
-            <a:schemeClr val="lt1"/>
-          </a:fontRef>
-        </p:style>
-        <p:txBody>
-          <a:bodyPr wrap="square" lIns="76200" tIns="38100" rIns="76200" bIns="38100" rtlCol="0" anchor="ctr">
-            <a:noAutofit/>
-          </a:bodyPr>
-          <a:lstStyle/>
-          <a:p>
-            <a:pPr algn="ctr"/>
-            <a:r>
-              <a:rPr lang="es-ES" sz="900" i="1">
-                <a:solidFill>
-                  <a:srgbClr val="666666"/>
-                </a:solidFill>
-                <a:latin typeface="Arial" panose="020B0604020202020204" pitchFamily="34" charset="0"/>
-              </a:rPr>
-              <a:t>CAPTURA PENDIENTE</a:t>
-            </a:r>
-          </a:p>
-          <a:p>
-            <a:pPr algn="ctr"/>
-            <a:r>
-              <a:rPr lang="es-ES" sz="900" i="1">
-                <a:solidFill>
-                  <a:srgbClr val="666666"/>
-                </a:solidFill>
-                <a:latin typeface="Arial" panose="020B0604020202020204" pitchFamily="34" charset="0"/>
-              </a:rPr>
-              <a:t>Pantalla móvil de conversión</a:t>
-            </a:r>
-            <a:endParaRPr lang="en-US" sz="900" i="1">
-              <a:solidFill>
-                <a:srgbClr val="666666"/>
-              </a:solidFill>
-              <a:latin typeface="Arial" panose="020B0604020202020204" pitchFamily="34" charset="0"/>
-            </a:endParaRPr>
-          </a:p>
-        </p:txBody>
-      </p:sp>
-      <p:sp>
-        <p:nvSpPr>
-          <p:cNvPr id="4" name="CAPTURA PENDIENTE - Pantalla móvil de inicio de sesión">
-            <a:extLst>
-              <a:ext uri="{FF2B5EF4-FFF2-40B4-BE49-F238E27FC236}">
-                <a16:creationId xmlns:a16="http://schemas.microsoft.com/office/drawing/2014/main" id="{19BF357B-B2D4-4484-A803-3A3A0B58DA81}"/>
-              </a:ext>
-            </a:extLst>
-          </p:cNvPr>
-          <p:cNvSpPr/>
+      </p:pic>
+      <p:pic>
+        <p:nvPicPr>
+          <p:cNvPr id="460" name="image51.png"/>
+          <p:cNvPicPr/>
           <p:nvPr/>
-        </p:nvSpPr>
+        </p:nvPicPr>
+        <p:blipFill>
+          <a:blip r:embed="rId4"/>
+          <a:srcRect/>
+          <a:stretch>
+            <a:fillRect/>
+          </a:stretch>
+        </p:blipFill>
         <p:spPr>
           <a:xfrm>
             <a:off x="595071" y="3523400"/>
@@ -32911,68 +31316,13 @@
           <a:prstGeom prst="rect">
             <a:avLst/>
           </a:prstGeom>
-          <a:solidFill>
-            <a:srgbClr val="FFFFFF"/>
-          </a:solidFill>
-          <a:ln w="15875">
+          <a:ln w="12700">
             <a:solidFill>
-              <a:srgbClr val="D9D9D9"/>
+              <a:srgbClr val="CCCCCC"/>
             </a:solidFill>
           </a:ln>
         </p:spPr>
-        <p:style>
-          <a:lnRef idx="2">
-            <a:schemeClr val="accent1">
-              <a:shade val="50000"/>
-            </a:schemeClr>
-          </a:lnRef>
-          <a:fillRef idx="1">
-            <a:schemeClr val="accent1"/>
-          </a:fillRef>
-          <a:effectRef idx="0">
-            <a:schemeClr val="accent1"/>
-          </a:effectRef>
-          <a:fontRef idx="minor">
-            <a:schemeClr val="lt1"/>
-          </a:fontRef>
-        </p:style>
-        <p:txBody>
-          <a:bodyPr wrap="square" lIns="76200" tIns="38100" rIns="76200" bIns="38100" rtlCol="0" anchor="ctr">
-            <a:noAutofit/>
-          </a:bodyPr>
-          <a:lstStyle/>
-          <a:p>
-            <a:pPr algn="ctr"/>
-            <a:r>
-              <a:rPr lang="es-ES" sz="900" i="1">
-                <a:solidFill>
-                  <a:srgbClr val="666666"/>
-                </a:solidFill>
-                <a:latin typeface="Arial" panose="020B0604020202020204" pitchFamily="34" charset="0"/>
-              </a:rPr>
-              <a:t>CAPTURA PENDIENTE</a:t>
-            </a:r>
-          </a:p>
-          <a:p>
-            <a:pPr algn="ctr"/>
-            <a:r>
-              <a:rPr lang="es-ES" sz="900" i="1">
-                <a:solidFill>
-                  <a:srgbClr val="666666"/>
-                </a:solidFill>
-                <a:latin typeface="Arial" panose="020B0604020202020204" pitchFamily="34" charset="0"/>
-              </a:rPr>
-              <a:t>Pantalla móvil de inicio de sesión</a:t>
-            </a:r>
-            <a:endParaRPr lang="en-US" sz="900" i="1">
-              <a:solidFill>
-                <a:srgbClr val="666666"/>
-              </a:solidFill>
-              <a:latin typeface="Arial" panose="020B0604020202020204" pitchFamily="34" charset="0"/>
-            </a:endParaRPr>
-          </a:p>
-        </p:txBody>
-      </p:sp>
+      </p:pic>
     </p:spTree>
   </p:cSld>
   <p:clrMapOvr>
@@ -33563,18 +31913,19 @@
           </a:p>
         </p:txBody>
       </p:sp>
-      <p:sp>
-        <p:nvSpPr>
-          <p:cNvPr id="2" name="CAPTURA PENDIENTE - Ejecución en dispositivo físico">
-            <a:extLst>
-              <a:ext uri="{FF2B5EF4-FFF2-40B4-BE49-F238E27FC236}">
-                <a16:creationId xmlns:a16="http://schemas.microsoft.com/office/drawing/2014/main" id="{F7F24898-5E29-416B-B91C-F98BB55D46E4}"/>
-              </a:ext>
-            </a:extLst>
-          </p:cNvPr>
-          <p:cNvSpPr/>
+      <p:pic>
+        <p:nvPicPr>
+          <p:cNvPr id="496" name="image50.png"/>
+          <p:cNvPicPr/>
           <p:nvPr/>
-        </p:nvSpPr>
+        </p:nvPicPr>
+        <p:blipFill>
+          <a:blip r:embed="rId3"/>
+          <a:srcRect/>
+          <a:stretch>
+            <a:fillRect/>
+          </a:stretch>
+        </p:blipFill>
         <p:spPr>
           <a:xfrm>
             <a:off x="4375360" y="3132224"/>
@@ -33583,80 +31934,26 @@
           <a:prstGeom prst="rect">
             <a:avLst/>
           </a:prstGeom>
-          <a:solidFill>
-            <a:srgbClr val="FFFFFF"/>
-          </a:solidFill>
-          <a:ln w="15875">
+          <a:ln w="12700">
             <a:solidFill>
-              <a:srgbClr val="D9D9D9"/>
+              <a:srgbClr val="CCCCCC"/>
             </a:solidFill>
           </a:ln>
         </p:spPr>
-        <p:style>
-          <a:lnRef idx="2">
-            <a:schemeClr val="accent1">
-              <a:shade val="50000"/>
-            </a:schemeClr>
-          </a:lnRef>
-          <a:fillRef idx="1">
-            <a:schemeClr val="accent1"/>
-          </a:fillRef>
-          <a:effectRef idx="0">
-            <a:schemeClr val="accent1"/>
-          </a:effectRef>
-          <a:fontRef idx="minor">
-            <a:schemeClr val="lt1"/>
-          </a:fontRef>
-        </p:style>
-        <p:txBody>
-          <a:bodyPr wrap="square" lIns="76200" tIns="38100" rIns="76200" bIns="38100" rtlCol="0" anchor="ctr">
-            <a:noAutofit/>
-          </a:bodyPr>
-          <a:lstStyle/>
-          <a:p>
-            <a:pPr algn="ctr"/>
-            <a:r>
-              <a:rPr lang="es-ES" sz="900" i="1">
-                <a:solidFill>
-                  <a:srgbClr val="666666"/>
-                </a:solidFill>
-                <a:latin typeface="Arial" panose="020B0604020202020204" pitchFamily="34" charset="0"/>
-              </a:rPr>
-              <a:t>CAPTURA PENDIENTE</a:t>
-            </a:r>
-          </a:p>
-          <a:p>
-            <a:pPr algn="ctr"/>
-            <a:r>
-              <a:rPr lang="es-ES" sz="900" i="1">
-                <a:solidFill>
-                  <a:srgbClr val="666666"/>
-                </a:solidFill>
-                <a:latin typeface="Arial" panose="020B0604020202020204" pitchFamily="34" charset="0"/>
-              </a:rPr>
-              <a:t>Ejecución en dispositivo físico</a:t>
-            </a:r>
-            <a:endParaRPr lang="en-US" sz="900" i="1">
-              <a:solidFill>
-                <a:srgbClr val="666666"/>
-              </a:solidFill>
-              <a:latin typeface="Arial" panose="020B0604020202020204" pitchFamily="34" charset="0"/>
-            </a:endParaRPr>
-          </a:p>
-        </p:txBody>
-      </p:sp>
-      <p:sp>
-        <p:nvSpPr>
-          <p:cNvPr id="3" name="CAPTURA PENDIENTE - Ejecución en emulador">
-            <a:extLst>
-              <a:ext uri="{FF2B5EF4-FFF2-40B4-BE49-F238E27FC236}">
-                <a16:creationId xmlns:a16="http://schemas.microsoft.com/office/drawing/2014/main" id="{2D123914-A870-495A-8538-9F7179BF353B}"/>
-              </a:ext>
-            </a:extLst>
-          </p:cNvPr>
-          <p:cNvSpPr/>
+      </p:pic>
+      <p:pic>
+        <p:nvPicPr>
+          <p:cNvPr id="497" name="image51.png"/>
+          <p:cNvPicPr/>
           <p:nvPr/>
-        </p:nvSpPr>
+        </p:nvPicPr>
+        <p:blipFill>
+          <a:blip r:embed="rId4"/>
+          <a:srcRect/>
+          <a:stretch>
+            <a:fillRect/>
+          </a:stretch>
+        </p:blipFill>
         <p:spPr>
           <a:xfrm>
             <a:off x="2107289" y="3132225"/>
@@ -33665,68 +31962,13 @@
           <a:prstGeom prst="rect">
             <a:avLst/>
           </a:prstGeom>
-          <a:solidFill>
-            <a:srgbClr val="FFFFFF"/>
-          </a:solidFill>
-          <a:ln w="15875">
+          <a:ln w="12700">
             <a:solidFill>
-              <a:srgbClr val="D9D9D9"/>
+              <a:srgbClr val="CCCCCC"/>
             </a:solidFill>
           </a:ln>
         </p:spPr>
-        <p:style>
-          <a:lnRef idx="2">
-            <a:schemeClr val="accent1">
-              <a:shade val="50000"/>
-            </a:schemeClr>
-          </a:lnRef>
-          <a:fillRef idx="1">
-            <a:schemeClr val="accent1"/>
-          </a:fillRef>
-          <a:effectRef idx="0">
-            <a:schemeClr val="accent1"/>
-          </a:effectRef>
-          <a:fontRef idx="minor">
-            <a:schemeClr val="lt1"/>
-          </a:fontRef>
-        </p:style>
-        <p:txBody>
-          <a:bodyPr wrap="square" lIns="76200" tIns="38100" rIns="76200" bIns="38100" rtlCol="0" anchor="ctr">
-            <a:noAutofit/>
-          </a:bodyPr>
-          <a:lstStyle/>
-          <a:p>
-            <a:pPr algn="ctr"/>
-            <a:r>
-              <a:rPr lang="es-ES" sz="900" i="1">
-                <a:solidFill>
-                  <a:srgbClr val="666666"/>
-                </a:solidFill>
-                <a:latin typeface="Arial" panose="020B0604020202020204" pitchFamily="34" charset="0"/>
-              </a:rPr>
-              <a:t>CAPTURA PENDIENTE</a:t>
-            </a:r>
-          </a:p>
-          <a:p>
-            <a:pPr algn="ctr"/>
-            <a:r>
-              <a:rPr lang="es-ES" sz="900" i="1">
-                <a:solidFill>
-                  <a:srgbClr val="666666"/>
-                </a:solidFill>
-                <a:latin typeface="Arial" panose="020B0604020202020204" pitchFamily="34" charset="0"/>
-              </a:rPr>
-              <a:t>Ejecución en emulador</a:t>
-            </a:r>
-            <a:endParaRPr lang="en-US" sz="900" i="1">
-              <a:solidFill>
-                <a:srgbClr val="666666"/>
-              </a:solidFill>
-              <a:latin typeface="Arial" panose="020B0604020202020204" pitchFamily="34" charset="0"/>
-            </a:endParaRPr>
-          </a:p>
-        </p:txBody>
-      </p:sp>
+      </p:pic>
     </p:spTree>
   </p:cSld>
   <p:clrMapOvr>
@@ -36321,18 +34563,19 @@
           </a:p>
         </p:txBody>
       </p:sp>
-      <p:sp>
-        <p:nvSpPr>
-          <p:cNvPr id="2" name="CAPTURA PENDIENTE - Estructura inicial del servidor">
-            <a:extLst>
-              <a:ext uri="{FF2B5EF4-FFF2-40B4-BE49-F238E27FC236}">
-                <a16:creationId xmlns:a16="http://schemas.microsoft.com/office/drawing/2014/main" id="{17E77EA3-1BEA-4179-BF94-998624423603}"/>
-              </a:ext>
-            </a:extLst>
-          </p:cNvPr>
-          <p:cNvSpPr/>
+      <p:pic>
+        <p:nvPicPr>
+          <p:cNvPr id="124" name="image13.png"/>
+          <p:cNvPicPr/>
           <p:nvPr/>
-        </p:nvSpPr>
+        </p:nvPicPr>
+        <p:blipFill>
+          <a:blip r:embed="rId3"/>
+          <a:srcRect/>
+          <a:stretch>
+            <a:fillRect/>
+          </a:stretch>
+        </p:blipFill>
         <p:spPr>
           <a:xfrm>
             <a:off x="6096000" y="3709191"/>
@@ -36341,80 +34584,26 @@
           <a:prstGeom prst="rect">
             <a:avLst/>
           </a:prstGeom>
-          <a:solidFill>
-            <a:srgbClr val="FFFFFF"/>
-          </a:solidFill>
-          <a:ln w="15875">
+          <a:ln w="12700">
             <a:solidFill>
-              <a:srgbClr val="D9D9D9"/>
+              <a:srgbClr val="CCCCCC"/>
             </a:solidFill>
           </a:ln>
         </p:spPr>
-        <p:style>
-          <a:lnRef idx="2">
-            <a:schemeClr val="accent1">
-              <a:shade val="50000"/>
-            </a:schemeClr>
-          </a:lnRef>
-          <a:fillRef idx="1">
-            <a:schemeClr val="accent1"/>
-          </a:fillRef>
-          <a:effectRef idx="0">
-            <a:schemeClr val="accent1"/>
-          </a:effectRef>
-          <a:fontRef idx="minor">
-            <a:schemeClr val="lt1"/>
-          </a:fontRef>
-        </p:style>
-        <p:txBody>
-          <a:bodyPr wrap="square" lIns="76200" tIns="38100" rIns="76200" bIns="38100" rtlCol="0" anchor="ctr">
-            <a:noAutofit/>
-          </a:bodyPr>
-          <a:lstStyle/>
-          <a:p>
-            <a:pPr algn="ctr"/>
-            <a:r>
-              <a:rPr lang="es-ES" sz="900" i="1">
-                <a:solidFill>
-                  <a:srgbClr val="666666"/>
-                </a:solidFill>
-                <a:latin typeface="Arial" panose="020B0604020202020204" pitchFamily="34" charset="0"/>
-              </a:rPr>
-              <a:t>CAPTURA PENDIENTE</a:t>
-            </a:r>
-          </a:p>
-          <a:p>
-            <a:pPr algn="ctr"/>
-            <a:r>
-              <a:rPr lang="es-ES" sz="900" i="1">
-                <a:solidFill>
-                  <a:srgbClr val="666666"/>
-                </a:solidFill>
-                <a:latin typeface="Arial" panose="020B0604020202020204" pitchFamily="34" charset="0"/>
-              </a:rPr>
-              <a:t>Estructura inicial del servidor</a:t>
-            </a:r>
-            <a:endParaRPr lang="en-US" sz="900" i="1">
-              <a:solidFill>
-                <a:srgbClr val="666666"/>
-              </a:solidFill>
-              <a:latin typeface="Arial" panose="020B0604020202020204" pitchFamily="34" charset="0"/>
-            </a:endParaRPr>
-          </a:p>
-        </p:txBody>
-      </p:sp>
-      <p:sp>
-        <p:nvSpPr>
-          <p:cNvPr id="3" name="CAPTURA PENDIENTE - Ajustes del endpoint y dependencias">
-            <a:extLst>
-              <a:ext uri="{FF2B5EF4-FFF2-40B4-BE49-F238E27FC236}">
-                <a16:creationId xmlns:a16="http://schemas.microsoft.com/office/drawing/2014/main" id="{50ACFE48-E015-4B57-A8E4-FBBB537BEA49}"/>
-              </a:ext>
-            </a:extLst>
-          </p:cNvPr>
-          <p:cNvSpPr/>
+      </p:pic>
+      <p:pic>
+        <p:nvPicPr>
+          <p:cNvPr id="125" name="image14.png"/>
+          <p:cNvPicPr/>
           <p:nvPr/>
-        </p:nvSpPr>
+        </p:nvPicPr>
+        <p:blipFill>
+          <a:blip r:embed="rId4"/>
+          <a:srcRect/>
+          <a:stretch>
+            <a:fillRect/>
+          </a:stretch>
+        </p:blipFill>
         <p:spPr>
           <a:xfrm>
             <a:off x="2953500" y="3716772"/>
@@ -36423,80 +34612,26 @@
           <a:prstGeom prst="rect">
             <a:avLst/>
           </a:prstGeom>
-          <a:solidFill>
-            <a:srgbClr val="FFFFFF"/>
-          </a:solidFill>
-          <a:ln w="15875">
+          <a:ln w="12700">
             <a:solidFill>
-              <a:srgbClr val="D9D9D9"/>
+              <a:srgbClr val="CCCCCC"/>
             </a:solidFill>
           </a:ln>
         </p:spPr>
-        <p:style>
-          <a:lnRef idx="2">
-            <a:schemeClr val="accent1">
-              <a:shade val="50000"/>
-            </a:schemeClr>
-          </a:lnRef>
-          <a:fillRef idx="1">
-            <a:schemeClr val="accent1"/>
-          </a:fillRef>
-          <a:effectRef idx="0">
-            <a:schemeClr val="accent1"/>
-          </a:effectRef>
-          <a:fontRef idx="minor">
-            <a:schemeClr val="lt1"/>
-          </a:fontRef>
-        </p:style>
-        <p:txBody>
-          <a:bodyPr wrap="square" lIns="76200" tIns="38100" rIns="76200" bIns="38100" rtlCol="0" anchor="ctr">
-            <a:noAutofit/>
-          </a:bodyPr>
-          <a:lstStyle/>
-          <a:p>
-            <a:pPr algn="ctr"/>
-            <a:r>
-              <a:rPr lang="es-ES" sz="900" i="1">
-                <a:solidFill>
-                  <a:srgbClr val="666666"/>
-                </a:solidFill>
-                <a:latin typeface="Arial" panose="020B0604020202020204" pitchFamily="34" charset="0"/>
-              </a:rPr>
-              <a:t>CAPTURA PENDIENTE</a:t>
-            </a:r>
-          </a:p>
-          <a:p>
-            <a:pPr algn="ctr"/>
-            <a:r>
-              <a:rPr lang="es-ES" sz="900" i="1">
-                <a:solidFill>
-                  <a:srgbClr val="666666"/>
-                </a:solidFill>
-                <a:latin typeface="Arial" panose="020B0604020202020204" pitchFamily="34" charset="0"/>
-              </a:rPr>
-              <a:t>Ajustes del endpoint y dependencias</a:t>
-            </a:r>
-            <a:endParaRPr lang="en-US" sz="900" i="1">
-              <a:solidFill>
-                <a:srgbClr val="666666"/>
-              </a:solidFill>
-              <a:latin typeface="Arial" panose="020B0604020202020204" pitchFamily="34" charset="0"/>
-            </a:endParaRPr>
-          </a:p>
-        </p:txBody>
-      </p:sp>
-      <p:sp>
-        <p:nvSpPr>
-          <p:cNvPr id="4" name="CAPTURA PENDIENTE - Proyecto Maven y configuración del servidor">
-            <a:extLst>
-              <a:ext uri="{FF2B5EF4-FFF2-40B4-BE49-F238E27FC236}">
-                <a16:creationId xmlns:a16="http://schemas.microsoft.com/office/drawing/2014/main" id="{BF619C64-20BD-4F4D-BA92-6F9DFDBD2226}"/>
-              </a:ext>
-            </a:extLst>
-          </p:cNvPr>
-          <p:cNvSpPr/>
+      </p:pic>
+      <p:pic>
+        <p:nvPicPr>
+          <p:cNvPr id="126" name="image15.png"/>
+          <p:cNvPicPr/>
           <p:nvPr/>
-        </p:nvSpPr>
+        </p:nvPicPr>
+        <p:blipFill>
+          <a:blip r:embed="rId5"/>
+          <a:srcRect/>
+          <a:stretch>
+            <a:fillRect/>
+          </a:stretch>
+        </p:blipFill>
         <p:spPr>
           <a:xfrm>
             <a:off x="234986" y="3724354"/>
@@ -36505,68 +34640,13 @@
           <a:prstGeom prst="rect">
             <a:avLst/>
           </a:prstGeom>
-          <a:solidFill>
-            <a:srgbClr val="FFFFFF"/>
-          </a:solidFill>
-          <a:ln w="15875">
+          <a:ln w="12700">
             <a:solidFill>
-              <a:srgbClr val="D9D9D9"/>
+              <a:srgbClr val="CCCCCC"/>
             </a:solidFill>
           </a:ln>
         </p:spPr>
-        <p:style>
-          <a:lnRef idx="2">
-            <a:schemeClr val="accent1">
-              <a:shade val="50000"/>
-            </a:schemeClr>
-          </a:lnRef>
-          <a:fillRef idx="1">
-            <a:schemeClr val="accent1"/>
-          </a:fillRef>
-          <a:effectRef idx="0">
-            <a:schemeClr val="accent1"/>
-          </a:effectRef>
-          <a:fontRef idx="minor">
-            <a:schemeClr val="lt1"/>
-          </a:fontRef>
-        </p:style>
-        <p:txBody>
-          <a:bodyPr wrap="square" lIns="76200" tIns="38100" rIns="76200" bIns="38100" rtlCol="0" anchor="ctr">
-            <a:noAutofit/>
-          </a:bodyPr>
-          <a:lstStyle/>
-          <a:p>
-            <a:pPr algn="ctr"/>
-            <a:r>
-              <a:rPr lang="es-ES" sz="900" i="1">
-                <a:solidFill>
-                  <a:srgbClr val="666666"/>
-                </a:solidFill>
-                <a:latin typeface="Arial" panose="020B0604020202020204" pitchFamily="34" charset="0"/>
-              </a:rPr>
-              <a:t>CAPTURA PENDIENTE</a:t>
-            </a:r>
-          </a:p>
-          <a:p>
-            <a:pPr algn="ctr"/>
-            <a:r>
-              <a:rPr lang="es-ES" sz="900" i="1">
-                <a:solidFill>
-                  <a:srgbClr val="666666"/>
-                </a:solidFill>
-                <a:latin typeface="Arial" panose="020B0604020202020204" pitchFamily="34" charset="0"/>
-              </a:rPr>
-              <a:t>Proyecto Maven y configuración del servidor</a:t>
-            </a:r>
-            <a:endParaRPr lang="en-US" sz="900" i="1">
-              <a:solidFill>
-                <a:srgbClr val="666666"/>
-              </a:solidFill>
-              <a:latin typeface="Arial" panose="020B0604020202020204" pitchFamily="34" charset="0"/>
-            </a:endParaRPr>
-          </a:p>
-        </p:txBody>
-      </p:sp>
+      </p:pic>
     </p:spTree>
   </p:cSld>
   <p:clrMapOvr>
@@ -37249,18 +35329,19 @@
           </a:p>
         </p:txBody>
       </p:sp>
-      <p:sp>
-        <p:nvSpPr>
-          <p:cNvPr id="2" name="CAPTURA PENDIENTE - Configuración de recursos y formato de respuesta">
-            <a:extLst>
-              <a:ext uri="{FF2B5EF4-FFF2-40B4-BE49-F238E27FC236}">
-                <a16:creationId xmlns:a16="http://schemas.microsoft.com/office/drawing/2014/main" id="{C7E1E34B-54B3-4282-9A1E-9BDE3F598B2F}"/>
-              </a:ext>
-            </a:extLst>
-          </p:cNvPr>
-          <p:cNvSpPr/>
+      <p:pic>
+        <p:nvPicPr>
+          <p:cNvPr id="142" name="image16.png"/>
+          <p:cNvPicPr/>
           <p:nvPr/>
-        </p:nvSpPr>
+        </p:nvPicPr>
+        <p:blipFill>
+          <a:blip r:embed="rId3"/>
+          <a:srcRect/>
+          <a:stretch>
+            <a:fillRect/>
+          </a:stretch>
+        </p:blipFill>
         <p:spPr>
           <a:xfrm>
             <a:off x="3174120" y="3429000"/>
@@ -37269,80 +35350,26 @@
           <a:prstGeom prst="rect">
             <a:avLst/>
           </a:prstGeom>
-          <a:solidFill>
-            <a:srgbClr val="FFFFFF"/>
-          </a:solidFill>
-          <a:ln w="15875">
+          <a:ln w="12700">
             <a:solidFill>
-              <a:srgbClr val="D9D9D9"/>
+              <a:srgbClr val="CCCCCC"/>
             </a:solidFill>
           </a:ln>
         </p:spPr>
-        <p:style>
-          <a:lnRef idx="2">
-            <a:schemeClr val="accent1">
-              <a:shade val="50000"/>
-            </a:schemeClr>
-          </a:lnRef>
-          <a:fillRef idx="1">
-            <a:schemeClr val="accent1"/>
-          </a:fillRef>
-          <a:effectRef idx="0">
-            <a:schemeClr val="accent1"/>
-          </a:effectRef>
-          <a:fontRef idx="minor">
-            <a:schemeClr val="lt1"/>
-          </a:fontRef>
-        </p:style>
-        <p:txBody>
-          <a:bodyPr wrap="square" lIns="76200" tIns="38100" rIns="76200" bIns="38100" rtlCol="0" anchor="ctr">
-            <a:noAutofit/>
-          </a:bodyPr>
-          <a:lstStyle/>
-          <a:p>
-            <a:pPr algn="ctr"/>
-            <a:r>
-              <a:rPr lang="es-ES" sz="900" i="1">
-                <a:solidFill>
-                  <a:srgbClr val="666666"/>
-                </a:solidFill>
-                <a:latin typeface="Arial" panose="020B0604020202020204" pitchFamily="34" charset="0"/>
-              </a:rPr>
-              <a:t>CAPTURA PENDIENTE</a:t>
-            </a:r>
-          </a:p>
-          <a:p>
-            <a:pPr algn="ctr"/>
-            <a:r>
-              <a:rPr lang="es-ES" sz="900" i="1">
-                <a:solidFill>
-                  <a:srgbClr val="666666"/>
-                </a:solidFill>
-                <a:latin typeface="Arial" panose="020B0604020202020204" pitchFamily="34" charset="0"/>
-              </a:rPr>
-              <a:t>Configuración de recursos y formato de respuesta</a:t>
-            </a:r>
-            <a:endParaRPr lang="en-US" sz="900" i="1">
-              <a:solidFill>
-                <a:srgbClr val="666666"/>
-              </a:solidFill>
-              <a:latin typeface="Arial" panose="020B0604020202020204" pitchFamily="34" charset="0"/>
-            </a:endParaRPr>
-          </a:p>
-        </p:txBody>
-      </p:sp>
-      <p:sp>
-        <p:nvSpPr>
-          <p:cNvPr id="4" name="CAPTURA PENDIENTE - Dependencias de servicios SOAP/REST">
-            <a:extLst>
-              <a:ext uri="{FF2B5EF4-FFF2-40B4-BE49-F238E27FC236}">
-                <a16:creationId xmlns:a16="http://schemas.microsoft.com/office/drawing/2014/main" id="{6227344A-0244-4E95-94DB-D55E648FE2B9}"/>
-              </a:ext>
-            </a:extLst>
-          </p:cNvPr>
-          <p:cNvSpPr/>
+      </p:pic>
+      <p:pic>
+        <p:nvPicPr>
+          <p:cNvPr id="143" name="image17.png"/>
+          <p:cNvPicPr/>
           <p:nvPr/>
-        </p:nvSpPr>
+        </p:nvPicPr>
+        <p:blipFill>
+          <a:blip r:embed="rId4"/>
+          <a:srcRect/>
+          <a:stretch>
+            <a:fillRect/>
+          </a:stretch>
+        </p:blipFill>
         <p:spPr>
           <a:xfrm>
             <a:off x="916342" y="3401152"/>
@@ -37351,62 +35378,13 @@
           <a:prstGeom prst="rect">
             <a:avLst/>
           </a:prstGeom>
-          <a:solidFill>
-            <a:srgbClr val="FFFFFF"/>
-          </a:solidFill>
-          <a:ln w="15875">
+          <a:ln w="12700">
             <a:solidFill>
-              <a:srgbClr val="D9D9D9"/>
+              <a:srgbClr val="CCCCCC"/>
             </a:solidFill>
           </a:ln>
         </p:spPr>
-        <p:style>
-          <a:lnRef idx="2">
-            <a:schemeClr val="accent1">
-              <a:shade val="50000"/>
-            </a:schemeClr>
-          </a:lnRef>
-          <a:fillRef idx="1">
-            <a:schemeClr val="accent1"/>
-          </a:fillRef>
-          <a:effectRef idx="0">
-            <a:schemeClr val="accent1"/>
-          </a:effectRef>
-          <a:fontRef idx="minor">
-            <a:schemeClr val="lt1"/>
-          </a:fontRef>
-        </p:style>
-        <p:txBody>
-          <a:bodyPr wrap="square" lIns="76200" tIns="38100" rIns="76200" bIns="38100" rtlCol="0" anchor="ctr">
-            <a:noAutofit/>
-          </a:bodyPr>
-          <a:lstStyle/>
-          <a:p>
-            <a:pPr algn="ctr"/>
-            <a:r>
-              <a:rPr lang="en-US" sz="900" i="1">
-                <a:solidFill>
-                  <a:srgbClr val="666666"/>
-                </a:solidFill>
-                <a:latin typeface="Arial" panose="020B0604020202020204" pitchFamily="34" charset="0"/>
-              </a:rPr>
-              <a:t>CAPTURA PENDIENTE</a:t>
-            </a:r>
-          </a:p>
-          <a:p>
-            <a:pPr algn="ctr"/>
-            <a:r>
-              <a:rPr lang="en-US" sz="900" i="1">
-                <a:solidFill>
-                  <a:srgbClr val="666666"/>
-                </a:solidFill>
-                <a:latin typeface="Arial" panose="020B0604020202020204" pitchFamily="34" charset="0"/>
-              </a:rPr>
-              <a:t>Dependencias Jersey y modelos JSON</a:t>
-            </a:r>
-          </a:p>
-        </p:txBody>
-      </p:sp>
+      </p:pic>
     </p:spTree>
   </p:cSld>
   <p:clrMapOvr>
@@ -38065,18 +36043,19 @@
           </a:p>
         </p:txBody>
       </p:sp>
-      <p:sp>
-        <p:nvSpPr>
-          <p:cNvPr id="2" name="CAPTURA PENDIENTE - Paquetes y componentes del servidor">
-            <a:extLst>
-              <a:ext uri="{FF2B5EF4-FFF2-40B4-BE49-F238E27FC236}">
-                <a16:creationId xmlns:a16="http://schemas.microsoft.com/office/drawing/2014/main" id="{454DCE1A-E548-4B0A-A877-3DAA336DC380}"/>
-              </a:ext>
-            </a:extLst>
-          </p:cNvPr>
-          <p:cNvSpPr/>
+      <p:pic>
+        <p:nvPicPr>
+          <p:cNvPr id="151" name="image18.png"/>
+          <p:cNvPicPr/>
           <p:nvPr/>
-        </p:nvSpPr>
+        </p:nvPicPr>
+        <p:blipFill>
+          <a:blip r:embed="rId3"/>
+          <a:srcRect/>
+          <a:stretch>
+            <a:fillRect/>
+          </a:stretch>
+        </p:blipFill>
         <p:spPr>
           <a:xfrm>
             <a:off x="5749937" y="2870106"/>
@@ -38085,68 +36064,13 @@
           <a:prstGeom prst="rect">
             <a:avLst/>
           </a:prstGeom>
-          <a:solidFill>
-            <a:srgbClr val="FFFFFF"/>
-          </a:solidFill>
-          <a:ln w="15875">
+          <a:ln w="12700">
             <a:solidFill>
-              <a:srgbClr val="D9D9D9"/>
+              <a:srgbClr val="CCCCCC"/>
             </a:solidFill>
           </a:ln>
         </p:spPr>
-        <p:style>
-          <a:lnRef idx="2">
-            <a:schemeClr val="accent1">
-              <a:shade val="50000"/>
-            </a:schemeClr>
-          </a:lnRef>
-          <a:fillRef idx="1">
-            <a:schemeClr val="accent1"/>
-          </a:fillRef>
-          <a:effectRef idx="0">
-            <a:schemeClr val="accent1"/>
-          </a:effectRef>
-          <a:fontRef idx="minor">
-            <a:schemeClr val="lt1"/>
-          </a:fontRef>
-        </p:style>
-        <p:txBody>
-          <a:bodyPr wrap="square" lIns="76200" tIns="38100" rIns="76200" bIns="38100" rtlCol="0" anchor="ctr">
-            <a:noAutofit/>
-          </a:bodyPr>
-          <a:lstStyle/>
-          <a:p>
-            <a:pPr algn="ctr"/>
-            <a:r>
-              <a:rPr lang="es-ES" sz="900" i="1">
-                <a:solidFill>
-                  <a:srgbClr val="666666"/>
-                </a:solidFill>
-                <a:latin typeface="Arial" panose="020B0604020202020204" pitchFamily="34" charset="0"/>
-              </a:rPr>
-              <a:t>CAPTURA PENDIENTE</a:t>
-            </a:r>
-          </a:p>
-          <a:p>
-            <a:pPr algn="ctr"/>
-            <a:r>
-              <a:rPr lang="es-ES" sz="900" i="1">
-                <a:solidFill>
-                  <a:srgbClr val="666666"/>
-                </a:solidFill>
-                <a:latin typeface="Arial" panose="020B0604020202020204" pitchFamily="34" charset="0"/>
-              </a:rPr>
-              <a:t>Paquetes y componentes del servidor</a:t>
-            </a:r>
-            <a:endParaRPr lang="en-US" sz="900" i="1">
-              <a:solidFill>
-                <a:srgbClr val="666666"/>
-              </a:solidFill>
-              <a:latin typeface="Arial" panose="020B0604020202020204" pitchFamily="34" charset="0"/>
-            </a:endParaRPr>
-          </a:p>
-        </p:txBody>
-      </p:sp>
+      </p:pic>
     </p:spTree>
   </p:cSld>
   <p:clrMapOvr>
@@ -38801,18 +36725,19 @@
           </a:p>
         </p:txBody>
       </p:sp>
-      <p:sp>
-        <p:nvSpPr>
-          <p:cNvPr id="2" name="CAPTURA PENDIENTE - Código de publicación o registro de recursos">
-            <a:extLst>
-              <a:ext uri="{FF2B5EF4-FFF2-40B4-BE49-F238E27FC236}">
-                <a16:creationId xmlns:a16="http://schemas.microsoft.com/office/drawing/2014/main" id="{AEDAC15D-A3D3-404F-9C5F-945CC788CB4C}"/>
-              </a:ext>
-            </a:extLst>
-          </p:cNvPr>
-          <p:cNvSpPr/>
+      <p:pic>
+        <p:nvPicPr>
+          <p:cNvPr id="167" name="image19.png"/>
+          <p:cNvPicPr/>
           <p:nvPr/>
-        </p:nvSpPr>
+        </p:nvPicPr>
+        <p:blipFill>
+          <a:blip r:embed="rId3"/>
+          <a:srcRect/>
+          <a:stretch>
+            <a:fillRect/>
+          </a:stretch>
+        </p:blipFill>
         <p:spPr>
           <a:xfrm>
             <a:off x="3875414" y="2817286"/>
@@ -38821,62 +36746,13 @@
           <a:prstGeom prst="rect">
             <a:avLst/>
           </a:prstGeom>
-          <a:solidFill>
-            <a:srgbClr val="FFFFFF"/>
-          </a:solidFill>
-          <a:ln w="15875">
+          <a:ln w="12700">
             <a:solidFill>
-              <a:srgbClr val="D9D9D9"/>
+              <a:srgbClr val="CCCCCC"/>
             </a:solidFill>
           </a:ln>
         </p:spPr>
-        <p:style>
-          <a:lnRef idx="2">
-            <a:schemeClr val="accent1">
-              <a:shade val="50000"/>
-            </a:schemeClr>
-          </a:lnRef>
-          <a:fillRef idx="1">
-            <a:schemeClr val="accent1"/>
-          </a:fillRef>
-          <a:effectRef idx="0">
-            <a:schemeClr val="accent1"/>
-          </a:effectRef>
-          <a:fontRef idx="minor">
-            <a:schemeClr val="lt1"/>
-          </a:fontRef>
-        </p:style>
-        <p:txBody>
-          <a:bodyPr wrap="square" lIns="76200" tIns="38100" rIns="76200" bIns="38100" rtlCol="0" anchor="ctr">
-            <a:noAutofit/>
-          </a:bodyPr>
-          <a:lstStyle/>
-          <a:p>
-            <a:pPr algn="ctr"/>
-            <a:r>
-              <a:rPr lang="en-US" sz="900" i="1">
-                <a:solidFill>
-                  <a:srgbClr val="666666"/>
-                </a:solidFill>
-                <a:latin typeface="Arial" panose="020B0604020202020204" pitchFamily="34" charset="0"/>
-              </a:rPr>
-              <a:t>CAPTURA PENDIENTE</a:t>
-            </a:r>
-          </a:p>
-          <a:p>
-            <a:pPr algn="ctr"/>
-            <a:r>
-              <a:rPr lang="en-US" sz="900" i="1">
-                <a:solidFill>
-                  <a:srgbClr val="666666"/>
-                </a:solidFill>
-                <a:latin typeface="Arial" panose="020B0604020202020204" pitchFamily="34" charset="0"/>
-              </a:rPr>
-              <a:t>Código de publicación o registro de recursos</a:t>
-            </a:r>
-          </a:p>
-        </p:txBody>
-      </p:sp>
+      </p:pic>
     </p:spTree>
   </p:cSld>
   <p:clrMapOvr>
@@ -39466,18 +37342,19 @@
           </a:p>
         </p:txBody>
       </p:sp>
-      <p:sp>
-        <p:nvSpPr>
-          <p:cNvPr id="2" name="CAPTURA PENDIENTE - Respuesta del servicio">
-            <a:extLst>
-              <a:ext uri="{FF2B5EF4-FFF2-40B4-BE49-F238E27FC236}">
-                <a16:creationId xmlns:a16="http://schemas.microsoft.com/office/drawing/2014/main" id="{B2C4A3B8-9E3D-4E18-9BFA-696E1A7A9839}"/>
-              </a:ext>
-            </a:extLst>
-          </p:cNvPr>
-          <p:cNvSpPr/>
+      <p:pic>
+        <p:nvPicPr>
+          <p:cNvPr id="191" name="image20.png"/>
+          <p:cNvPicPr/>
           <p:nvPr/>
-        </p:nvSpPr>
+        </p:nvPicPr>
+        <p:blipFill>
+          <a:blip r:embed="rId3"/>
+          <a:srcRect/>
+          <a:stretch>
+            <a:fillRect/>
+          </a:stretch>
+        </p:blipFill>
         <p:spPr>
           <a:xfrm>
             <a:off x="5818100" y="4415104"/>
@@ -39486,80 +37363,26 @@
           <a:prstGeom prst="rect">
             <a:avLst/>
           </a:prstGeom>
-          <a:solidFill>
-            <a:srgbClr val="FFFFFF"/>
-          </a:solidFill>
-          <a:ln w="15875">
+          <a:ln w="12700">
             <a:solidFill>
-              <a:srgbClr val="D9D9D9"/>
+              <a:srgbClr val="CCCCCC"/>
             </a:solidFill>
           </a:ln>
         </p:spPr>
-        <p:style>
-          <a:lnRef idx="2">
-            <a:schemeClr val="accent1">
-              <a:shade val="50000"/>
-            </a:schemeClr>
-          </a:lnRef>
-          <a:fillRef idx="1">
-            <a:schemeClr val="accent1"/>
-          </a:fillRef>
-          <a:effectRef idx="0">
-            <a:schemeClr val="accent1"/>
-          </a:effectRef>
-          <a:fontRef idx="minor">
-            <a:schemeClr val="lt1"/>
-          </a:fontRef>
-        </p:style>
-        <p:txBody>
-          <a:bodyPr wrap="square" lIns="76200" tIns="38100" rIns="76200" bIns="38100" rtlCol="0" anchor="ctr">
-            <a:noAutofit/>
-          </a:bodyPr>
-          <a:lstStyle/>
-          <a:p>
-            <a:pPr algn="ctr"/>
-            <a:r>
-              <a:rPr lang="es-ES" sz="900" i="1">
-                <a:solidFill>
-                  <a:srgbClr val="666666"/>
-                </a:solidFill>
-                <a:latin typeface="Arial" panose="020B0604020202020204" pitchFamily="34" charset="0"/>
-              </a:rPr>
-              <a:t>CAPTURA PENDIENTE</a:t>
-            </a:r>
-          </a:p>
-          <a:p>
-            <a:pPr algn="ctr"/>
-            <a:r>
-              <a:rPr lang="es-ES" sz="900" i="1">
-                <a:solidFill>
-                  <a:srgbClr val="666666"/>
-                </a:solidFill>
-                <a:latin typeface="Arial" panose="020B0604020202020204" pitchFamily="34" charset="0"/>
-              </a:rPr>
-              <a:t>Respuesta del servicio</a:t>
-            </a:r>
-            <a:endParaRPr lang="en-US" sz="900" i="1">
-              <a:solidFill>
-                <a:srgbClr val="666666"/>
-              </a:solidFill>
-              <a:latin typeface="Arial" panose="020B0604020202020204" pitchFamily="34" charset="0"/>
-            </a:endParaRPr>
-          </a:p>
-        </p:txBody>
-      </p:sp>
-      <p:sp>
-        <p:nvSpPr>
-          <p:cNvPr id="3" name="CAPTURA PENDIENTE - Prueba de conversión de temperatura">
-            <a:extLst>
-              <a:ext uri="{FF2B5EF4-FFF2-40B4-BE49-F238E27FC236}">
-                <a16:creationId xmlns:a16="http://schemas.microsoft.com/office/drawing/2014/main" id="{465518C2-7DAD-4640-87B0-13850D7F0BF1}"/>
-              </a:ext>
-            </a:extLst>
-          </p:cNvPr>
-          <p:cNvSpPr/>
+      </p:pic>
+      <p:pic>
+        <p:nvPicPr>
+          <p:cNvPr id="192" name="image21.png"/>
+          <p:cNvPicPr/>
           <p:nvPr/>
-        </p:nvSpPr>
+        </p:nvPicPr>
+        <p:blipFill>
+          <a:blip r:embed="rId4"/>
+          <a:srcRect/>
+          <a:stretch>
+            <a:fillRect/>
+          </a:stretch>
+        </p:blipFill>
         <p:spPr>
           <a:xfrm>
             <a:off x="2961150" y="4415104"/>
@@ -39568,80 +37391,26 @@
           <a:prstGeom prst="rect">
             <a:avLst/>
           </a:prstGeom>
-          <a:solidFill>
-            <a:srgbClr val="FFFFFF"/>
-          </a:solidFill>
-          <a:ln w="15875">
+          <a:ln w="12700">
             <a:solidFill>
-              <a:srgbClr val="D9D9D9"/>
+              <a:srgbClr val="CCCCCC"/>
             </a:solidFill>
           </a:ln>
         </p:spPr>
-        <p:style>
-          <a:lnRef idx="2">
-            <a:schemeClr val="accent1">
-              <a:shade val="50000"/>
-            </a:schemeClr>
-          </a:lnRef>
-          <a:fillRef idx="1">
-            <a:schemeClr val="accent1"/>
-          </a:fillRef>
-          <a:effectRef idx="0">
-            <a:schemeClr val="accent1"/>
-          </a:effectRef>
-          <a:fontRef idx="minor">
-            <a:schemeClr val="lt1"/>
-          </a:fontRef>
-        </p:style>
-        <p:txBody>
-          <a:bodyPr wrap="square" lIns="76200" tIns="38100" rIns="76200" bIns="38100" rtlCol="0" anchor="ctr">
-            <a:noAutofit/>
-          </a:bodyPr>
-          <a:lstStyle/>
-          <a:p>
-            <a:pPr algn="ctr"/>
-            <a:r>
-              <a:rPr lang="es-ES" sz="900" i="1">
-                <a:solidFill>
-                  <a:srgbClr val="666666"/>
-                </a:solidFill>
-                <a:latin typeface="Arial" panose="020B0604020202020204" pitchFamily="34" charset="0"/>
-              </a:rPr>
-              <a:t>CAPTURA PENDIENTE</a:t>
-            </a:r>
-          </a:p>
-          <a:p>
-            <a:pPr algn="ctr"/>
-            <a:r>
-              <a:rPr lang="es-ES" sz="900" i="1">
-                <a:solidFill>
-                  <a:srgbClr val="666666"/>
-                </a:solidFill>
-                <a:latin typeface="Arial" panose="020B0604020202020204" pitchFamily="34" charset="0"/>
-              </a:rPr>
-              <a:t>Prueba de conversión de temperatura</a:t>
-            </a:r>
-            <a:endParaRPr lang="en-US" sz="900" i="1">
-              <a:solidFill>
-                <a:srgbClr val="666666"/>
-              </a:solidFill>
-              <a:latin typeface="Arial" panose="020B0604020202020204" pitchFamily="34" charset="0"/>
-            </a:endParaRPr>
-          </a:p>
-        </p:txBody>
-      </p:sp>
-      <p:sp>
-        <p:nvSpPr>
-          <p:cNvPr id="4" name="CAPTURA PENDIENTE - Prueba de conversión de masa">
-            <a:extLst>
-              <a:ext uri="{FF2B5EF4-FFF2-40B4-BE49-F238E27FC236}">
-                <a16:creationId xmlns:a16="http://schemas.microsoft.com/office/drawing/2014/main" id="{C0532E73-4590-4CA0-9537-FB9AAEE1A6CE}"/>
-              </a:ext>
-            </a:extLst>
-          </p:cNvPr>
-          <p:cNvSpPr/>
+      </p:pic>
+      <p:pic>
+        <p:nvPicPr>
+          <p:cNvPr id="193" name="image22.png"/>
+          <p:cNvPicPr/>
           <p:nvPr/>
-        </p:nvSpPr>
+        </p:nvPicPr>
+        <p:blipFill>
+          <a:blip r:embed="rId5"/>
+          <a:srcRect/>
+          <a:stretch>
+            <a:fillRect/>
+          </a:stretch>
+        </p:blipFill>
         <p:spPr>
           <a:xfrm>
             <a:off x="330934" y="4415104"/>
@@ -39650,80 +37419,26 @@
           <a:prstGeom prst="rect">
             <a:avLst/>
           </a:prstGeom>
-          <a:solidFill>
-            <a:srgbClr val="FFFFFF"/>
-          </a:solidFill>
-          <a:ln w="15875">
+          <a:ln w="12700">
             <a:solidFill>
-              <a:srgbClr val="D9D9D9"/>
+              <a:srgbClr val="CCCCCC"/>
             </a:solidFill>
           </a:ln>
         </p:spPr>
-        <p:style>
-          <a:lnRef idx="2">
-            <a:schemeClr val="accent1">
-              <a:shade val="50000"/>
-            </a:schemeClr>
-          </a:lnRef>
-          <a:fillRef idx="1">
-            <a:schemeClr val="accent1"/>
-          </a:fillRef>
-          <a:effectRef idx="0">
-            <a:schemeClr val="accent1"/>
-          </a:effectRef>
-          <a:fontRef idx="minor">
-            <a:schemeClr val="lt1"/>
-          </a:fontRef>
-        </p:style>
-        <p:txBody>
-          <a:bodyPr wrap="square" lIns="76200" tIns="38100" rIns="76200" bIns="38100" rtlCol="0" anchor="ctr">
-            <a:noAutofit/>
-          </a:bodyPr>
-          <a:lstStyle/>
-          <a:p>
-            <a:pPr algn="ctr"/>
-            <a:r>
-              <a:rPr lang="es-ES" sz="900" i="1">
-                <a:solidFill>
-                  <a:srgbClr val="666666"/>
-                </a:solidFill>
-                <a:latin typeface="Arial" panose="020B0604020202020204" pitchFamily="34" charset="0"/>
-              </a:rPr>
-              <a:t>CAPTURA PENDIENTE</a:t>
-            </a:r>
-          </a:p>
-          <a:p>
-            <a:pPr algn="ctr"/>
-            <a:r>
-              <a:rPr lang="es-ES" sz="900" i="1">
-                <a:solidFill>
-                  <a:srgbClr val="666666"/>
-                </a:solidFill>
-                <a:latin typeface="Arial" panose="020B0604020202020204" pitchFamily="34" charset="0"/>
-              </a:rPr>
-              <a:t>Prueba de conversión de masa</a:t>
-            </a:r>
-            <a:endParaRPr lang="en-US" sz="900" i="1">
-              <a:solidFill>
-                <a:srgbClr val="666666"/>
-              </a:solidFill>
-              <a:latin typeface="Arial" panose="020B0604020202020204" pitchFamily="34" charset="0"/>
-            </a:endParaRPr>
-          </a:p>
-        </p:txBody>
-      </p:sp>
-      <p:sp>
-        <p:nvSpPr>
-          <p:cNvPr id="5" name="CAPTURA PENDIENTE - Prueba de conversión de longitud">
-            <a:extLst>
-              <a:ext uri="{FF2B5EF4-FFF2-40B4-BE49-F238E27FC236}">
-                <a16:creationId xmlns:a16="http://schemas.microsoft.com/office/drawing/2014/main" id="{2D1CD486-4A7B-4EB5-9791-8DAA5B3291E4}"/>
-              </a:ext>
-            </a:extLst>
-          </p:cNvPr>
-          <p:cNvSpPr/>
+      </p:pic>
+      <p:pic>
+        <p:nvPicPr>
+          <p:cNvPr id="194" name="image23.png"/>
+          <p:cNvPicPr/>
           <p:nvPr/>
-        </p:nvSpPr>
+        </p:nvPicPr>
+        <p:blipFill>
+          <a:blip r:embed="rId6"/>
+          <a:srcRect/>
+          <a:stretch>
+            <a:fillRect/>
+          </a:stretch>
+        </p:blipFill>
         <p:spPr>
           <a:xfrm>
             <a:off x="4671319" y="1994161"/>
@@ -39732,80 +37447,26 @@
           <a:prstGeom prst="rect">
             <a:avLst/>
           </a:prstGeom>
-          <a:solidFill>
-            <a:srgbClr val="FFFFFF"/>
-          </a:solidFill>
-          <a:ln w="15875">
+          <a:ln w="12700">
             <a:solidFill>
-              <a:srgbClr val="D9D9D9"/>
+              <a:srgbClr val="CCCCCC"/>
             </a:solidFill>
           </a:ln>
         </p:spPr>
-        <p:style>
-          <a:lnRef idx="2">
-            <a:schemeClr val="accent1">
-              <a:shade val="50000"/>
-            </a:schemeClr>
-          </a:lnRef>
-          <a:fillRef idx="1">
-            <a:schemeClr val="accent1"/>
-          </a:fillRef>
-          <a:effectRef idx="0">
-            <a:schemeClr val="accent1"/>
-          </a:effectRef>
-          <a:fontRef idx="minor">
-            <a:schemeClr val="lt1"/>
-          </a:fontRef>
-        </p:style>
-        <p:txBody>
-          <a:bodyPr wrap="square" lIns="76200" tIns="38100" rIns="76200" bIns="38100" rtlCol="0" anchor="ctr">
-            <a:noAutofit/>
-          </a:bodyPr>
-          <a:lstStyle/>
-          <a:p>
-            <a:pPr algn="ctr"/>
-            <a:r>
-              <a:rPr lang="es-ES" sz="900" i="1">
-                <a:solidFill>
-                  <a:srgbClr val="666666"/>
-                </a:solidFill>
-                <a:latin typeface="Arial" panose="020B0604020202020204" pitchFamily="34" charset="0"/>
-              </a:rPr>
-              <a:t>CAPTURA PENDIENTE</a:t>
-            </a:r>
-          </a:p>
-          <a:p>
-            <a:pPr algn="ctr"/>
-            <a:r>
-              <a:rPr lang="es-ES" sz="900" i="1">
-                <a:solidFill>
-                  <a:srgbClr val="666666"/>
-                </a:solidFill>
-                <a:latin typeface="Arial" panose="020B0604020202020204" pitchFamily="34" charset="0"/>
-              </a:rPr>
-              <a:t>Prueba de conversión de longitud</a:t>
-            </a:r>
-            <a:endParaRPr lang="en-US" sz="900" i="1">
-              <a:solidFill>
-                <a:srgbClr val="666666"/>
-              </a:solidFill>
-              <a:latin typeface="Arial" panose="020B0604020202020204" pitchFamily="34" charset="0"/>
-            </a:endParaRPr>
-          </a:p>
-        </p:txBody>
-      </p:sp>
-      <p:sp>
-        <p:nvSpPr>
-          <p:cNvPr id="6" name="CAPTURA PENDIENTE - Prueba de autenticación">
-            <a:extLst>
-              <a:ext uri="{FF2B5EF4-FFF2-40B4-BE49-F238E27FC236}">
-                <a16:creationId xmlns:a16="http://schemas.microsoft.com/office/drawing/2014/main" id="{CEB29770-1EED-4DD7-8C23-D733A4854BCB}"/>
-              </a:ext>
-            </a:extLst>
-          </p:cNvPr>
-          <p:cNvSpPr/>
+      </p:pic>
+      <p:pic>
+        <p:nvPicPr>
+          <p:cNvPr id="195" name="image20.png"/>
+          <p:cNvPicPr/>
           <p:nvPr/>
-        </p:nvSpPr>
+        </p:nvPicPr>
+        <p:blipFill>
+          <a:blip r:embed="rId7"/>
+          <a:srcRect/>
+          <a:stretch>
+            <a:fillRect/>
+          </a:stretch>
+        </p:blipFill>
         <p:spPr>
           <a:xfrm>
             <a:off x="679863" y="2724790"/>
@@ -39814,68 +37475,13 @@
           <a:prstGeom prst="rect">
             <a:avLst/>
           </a:prstGeom>
-          <a:solidFill>
-            <a:srgbClr val="FFFFFF"/>
-          </a:solidFill>
-          <a:ln w="15875">
+          <a:ln w="12700">
             <a:solidFill>
-              <a:srgbClr val="D9D9D9"/>
+              <a:srgbClr val="CCCCCC"/>
             </a:solidFill>
           </a:ln>
         </p:spPr>
-        <p:style>
-          <a:lnRef idx="2">
-            <a:schemeClr val="accent1">
-              <a:shade val="50000"/>
-            </a:schemeClr>
-          </a:lnRef>
-          <a:fillRef idx="1">
-            <a:schemeClr val="accent1"/>
-          </a:fillRef>
-          <a:effectRef idx="0">
-            <a:schemeClr val="accent1"/>
-          </a:effectRef>
-          <a:fontRef idx="minor">
-            <a:schemeClr val="lt1"/>
-          </a:fontRef>
-        </p:style>
-        <p:txBody>
-          <a:bodyPr wrap="square" lIns="76200" tIns="38100" rIns="76200" bIns="38100" rtlCol="0" anchor="ctr">
-            <a:noAutofit/>
-          </a:bodyPr>
-          <a:lstStyle/>
-          <a:p>
-            <a:pPr algn="ctr"/>
-            <a:r>
-              <a:rPr lang="es-ES" sz="900" i="1">
-                <a:solidFill>
-                  <a:srgbClr val="666666"/>
-                </a:solidFill>
-                <a:latin typeface="Arial" panose="020B0604020202020204" pitchFamily="34" charset="0"/>
-              </a:rPr>
-              <a:t>CAPTURA PENDIENTE</a:t>
-            </a:r>
-          </a:p>
-          <a:p>
-            <a:pPr algn="ctr"/>
-            <a:r>
-              <a:rPr lang="es-ES" sz="900" i="1">
-                <a:solidFill>
-                  <a:srgbClr val="666666"/>
-                </a:solidFill>
-                <a:latin typeface="Arial" panose="020B0604020202020204" pitchFamily="34" charset="0"/>
-              </a:rPr>
-              <a:t>Prueba de autenticación</a:t>
-            </a:r>
-            <a:endParaRPr lang="en-US" sz="900" i="1">
-              <a:solidFill>
-                <a:srgbClr val="666666"/>
-              </a:solidFill>
-              <a:latin typeface="Arial" panose="020B0604020202020204" pitchFamily="34" charset="0"/>
-            </a:endParaRPr>
-          </a:p>
-        </p:txBody>
-      </p:sp>
+      </p:pic>
     </p:spTree>
   </p:cSld>
   <p:clrMapOvr>
@@ -40550,18 +38156,19 @@
           </a:p>
         </p:txBody>
       </p:sp>
-      <p:sp>
-        <p:nvSpPr>
-          <p:cNvPr id="2" name="CAPTURA PENDIENTE - Configuración del cliente de consola">
-            <a:extLst>
-              <a:ext uri="{FF2B5EF4-FFF2-40B4-BE49-F238E27FC236}">
-                <a16:creationId xmlns:a16="http://schemas.microsoft.com/office/drawing/2014/main" id="{470F980C-FB47-44A7-A8A8-971BCFC63D51}"/>
-              </a:ext>
-            </a:extLst>
-          </p:cNvPr>
-          <p:cNvSpPr/>
+      <p:pic>
+        <p:nvPicPr>
+          <p:cNvPr id="223" name="image24.png"/>
+          <p:cNvPicPr/>
           <p:nvPr/>
-        </p:nvSpPr>
+        </p:nvPicPr>
+        <p:blipFill>
+          <a:blip r:embed="rId3"/>
+          <a:srcRect/>
+          <a:stretch>
+            <a:fillRect/>
+          </a:stretch>
+        </p:blipFill>
         <p:spPr>
           <a:xfrm>
             <a:off x="4740234" y="3657435"/>
@@ -40570,80 +38177,26 @@
           <a:prstGeom prst="rect">
             <a:avLst/>
           </a:prstGeom>
-          <a:solidFill>
-            <a:srgbClr val="FFFFFF"/>
-          </a:solidFill>
-          <a:ln w="15875">
+          <a:ln w="12700">
             <a:solidFill>
-              <a:srgbClr val="D9D9D9"/>
+              <a:srgbClr val="CCCCCC"/>
             </a:solidFill>
           </a:ln>
         </p:spPr>
-        <p:style>
-          <a:lnRef idx="2">
-            <a:schemeClr val="accent1">
-              <a:shade val="50000"/>
-            </a:schemeClr>
-          </a:lnRef>
-          <a:fillRef idx="1">
-            <a:schemeClr val="accent1"/>
-          </a:fillRef>
-          <a:effectRef idx="0">
-            <a:schemeClr val="accent1"/>
-          </a:effectRef>
-          <a:fontRef idx="minor">
-            <a:schemeClr val="lt1"/>
-          </a:fontRef>
-        </p:style>
-        <p:txBody>
-          <a:bodyPr wrap="square" lIns="76200" tIns="38100" rIns="76200" bIns="38100" rtlCol="0" anchor="ctr">
-            <a:noAutofit/>
-          </a:bodyPr>
-          <a:lstStyle/>
-          <a:p>
-            <a:pPr algn="ctr"/>
-            <a:r>
-              <a:rPr lang="es-ES" sz="900" i="1">
-                <a:solidFill>
-                  <a:srgbClr val="666666"/>
-                </a:solidFill>
-                <a:latin typeface="Arial" panose="020B0604020202020204" pitchFamily="34" charset="0"/>
-              </a:rPr>
-              <a:t>CAPTURA PENDIENTE</a:t>
-            </a:r>
-          </a:p>
-          <a:p>
-            <a:pPr algn="ctr"/>
-            <a:r>
-              <a:rPr lang="es-ES" sz="900" i="1">
-                <a:solidFill>
-                  <a:srgbClr val="666666"/>
-                </a:solidFill>
-                <a:latin typeface="Arial" panose="020B0604020202020204" pitchFamily="34" charset="0"/>
-              </a:rPr>
-              <a:t>Configuración del cliente de consola</a:t>
-            </a:r>
-            <a:endParaRPr lang="en-US" sz="900" i="1">
-              <a:solidFill>
-                <a:srgbClr val="666666"/>
-              </a:solidFill>
-              <a:latin typeface="Arial" panose="020B0604020202020204" pitchFamily="34" charset="0"/>
-            </a:endParaRPr>
-          </a:p>
-        </p:txBody>
-      </p:sp>
-      <p:sp>
-        <p:nvSpPr>
-          <p:cNvPr id="3" name="CAPTURA PENDIENTE - Creación del proyecto Java Maven">
-            <a:extLst>
-              <a:ext uri="{FF2B5EF4-FFF2-40B4-BE49-F238E27FC236}">
-                <a16:creationId xmlns:a16="http://schemas.microsoft.com/office/drawing/2014/main" id="{85E12E47-F5C4-4ED2-9344-5707D2189E30}"/>
-              </a:ext>
-            </a:extLst>
-          </p:cNvPr>
-          <p:cNvSpPr/>
+      </p:pic>
+      <p:pic>
+        <p:nvPicPr>
+          <p:cNvPr id="224" name="image25.png"/>
+          <p:cNvPicPr/>
           <p:nvPr/>
-        </p:nvSpPr>
+        </p:nvPicPr>
+        <p:blipFill>
+          <a:blip r:embed="rId4"/>
+          <a:srcRect/>
+          <a:stretch>
+            <a:fillRect/>
+          </a:stretch>
+        </p:blipFill>
         <p:spPr>
           <a:xfrm>
             <a:off x="466506" y="3674580"/>
@@ -40652,68 +38205,13 @@
           <a:prstGeom prst="rect">
             <a:avLst/>
           </a:prstGeom>
-          <a:solidFill>
-            <a:srgbClr val="FFFFFF"/>
-          </a:solidFill>
-          <a:ln w="15875">
+          <a:ln w="12700">
             <a:solidFill>
-              <a:srgbClr val="D9D9D9"/>
+              <a:srgbClr val="CCCCCC"/>
             </a:solidFill>
           </a:ln>
         </p:spPr>
-        <p:style>
-          <a:lnRef idx="2">
-            <a:schemeClr val="accent1">
-              <a:shade val="50000"/>
-            </a:schemeClr>
-          </a:lnRef>
-          <a:fillRef idx="1">
-            <a:schemeClr val="accent1"/>
-          </a:fillRef>
-          <a:effectRef idx="0">
-            <a:schemeClr val="accent1"/>
-          </a:effectRef>
-          <a:fontRef idx="minor">
-            <a:schemeClr val="lt1"/>
-          </a:fontRef>
-        </p:style>
-        <p:txBody>
-          <a:bodyPr wrap="square" lIns="76200" tIns="38100" rIns="76200" bIns="38100" rtlCol="0" anchor="ctr">
-            <a:noAutofit/>
-          </a:bodyPr>
-          <a:lstStyle/>
-          <a:p>
-            <a:pPr algn="ctr"/>
-            <a:r>
-              <a:rPr lang="es-ES" sz="900" i="1">
-                <a:solidFill>
-                  <a:srgbClr val="666666"/>
-                </a:solidFill>
-                <a:latin typeface="Arial" panose="020B0604020202020204" pitchFamily="34" charset="0"/>
-              </a:rPr>
-              <a:t>CAPTURA PENDIENTE</a:t>
-            </a:r>
-          </a:p>
-          <a:p>
-            <a:pPr algn="ctr"/>
-            <a:r>
-              <a:rPr lang="es-ES" sz="900" i="1">
-                <a:solidFill>
-                  <a:srgbClr val="666666"/>
-                </a:solidFill>
-                <a:latin typeface="Arial" panose="020B0604020202020204" pitchFamily="34" charset="0"/>
-              </a:rPr>
-              <a:t>Creación del proyecto Java Maven</a:t>
-            </a:r>
-            <a:endParaRPr lang="en-US" sz="900" i="1">
-              <a:solidFill>
-                <a:srgbClr val="666666"/>
-              </a:solidFill>
-              <a:latin typeface="Arial" panose="020B0604020202020204" pitchFamily="34" charset="0"/>
-            </a:endParaRPr>
-          </a:p>
-        </p:txBody>
-      </p:sp>
+      </p:pic>
     </p:spTree>
   </p:cSld>
   <p:clrMapOvr>

--- a/TI.1.3. PAO202651_RESTFUL_JAVA_SINBDD_NRC36884_GR09/05. DOCUMENTACION/CONVUNI_RESTFUL_JAVA_GR09.pptx
+++ b/TI.1.3. PAO202651_RESTFUL_JAVA_SINBDD_NRC36884_GR09/05. DOCUMENTACION/CONVUNI_RESTFUL_JAVA_GR09.pptx
@@ -30579,7 +30579,7 @@
 </file>
 
 <file path=ppt/slides/slide27.xml><?xml version="1.0" encoding="utf-8"?>
-<p:sld xmlns:a="http://schemas.openxmlformats.org/drawingml/2006/main" xmlns:r="http://schemas.openxmlformats.org/officeDocument/2006/relationships" xmlns:p="http://schemas.openxmlformats.org/presentationml/2006/main">
+<p:sld xmlns:a="http://schemas.openxmlformats.org/drawingml/2006/main" xmlns:p="http://schemas.openxmlformats.org/presentationml/2006/main" xmlns:r="http://schemas.openxmlformats.org/officeDocument/2006/relationships">
   <p:cSld>
     <p:spTree>
       <p:nvGrpSpPr>
@@ -31269,34 +31269,6 @@
       </p:sp>
       <p:pic>
         <p:nvPicPr>
-          <p:cNvPr id="459" name="image50.png"/>
-          <p:cNvPicPr/>
-          <p:nvPr/>
-        </p:nvPicPr>
-        <p:blipFill>
-          <a:blip r:embed="rId3"/>
-          <a:srcRect/>
-          <a:stretch>
-            <a:fillRect/>
-          </a:stretch>
-        </p:blipFill>
-        <p:spPr>
-          <a:xfrm>
-            <a:off x="5096586" y="3395466"/>
-            <a:ext cx="3346888" cy="3121255"/>
-          </a:xfrm>
-          <a:prstGeom prst="rect">
-            <a:avLst/>
-          </a:prstGeom>
-          <a:ln w="12700">
-            <a:solidFill>
-              <a:srgbClr val="CCCCCC"/>
-            </a:solidFill>
-          </a:ln>
-        </p:spPr>
-      </p:pic>
-      <p:pic>
-        <p:nvPicPr>
           <p:cNvPr id="460" name="image51.png"/>
           <p:cNvPicPr/>
           <p:nvPr/>
@@ -31332,7 +31304,7 @@
 </file>
 
 <file path=ppt/slides/slide28.xml><?xml version="1.0" encoding="utf-8"?>
-<p:sld xmlns:a="http://schemas.openxmlformats.org/drawingml/2006/main" xmlns:r="http://schemas.openxmlformats.org/officeDocument/2006/relationships" xmlns:p="http://schemas.openxmlformats.org/presentationml/2006/main">
+<p:sld xmlns:a="http://schemas.openxmlformats.org/drawingml/2006/main" xmlns:p="http://schemas.openxmlformats.org/presentationml/2006/main" xmlns:r="http://schemas.openxmlformats.org/officeDocument/2006/relationships">
   <p:cSld>
     <p:spTree>
       <p:nvGrpSpPr>
@@ -31913,34 +31885,6 @@
           </a:p>
         </p:txBody>
       </p:sp>
-      <p:pic>
-        <p:nvPicPr>
-          <p:cNvPr id="496" name="image50.png"/>
-          <p:cNvPicPr/>
-          <p:nvPr/>
-        </p:nvPicPr>
-        <p:blipFill>
-          <a:blip r:embed="rId3"/>
-          <a:srcRect/>
-          <a:stretch>
-            <a:fillRect/>
-          </a:stretch>
-        </p:blipFill>
-        <p:spPr>
-          <a:xfrm>
-            <a:off x="4375360" y="3132224"/>
-            <a:ext cx="1577205" cy="3469750"/>
-          </a:xfrm>
-          <a:prstGeom prst="rect">
-            <a:avLst/>
-          </a:prstGeom>
-          <a:ln w="12700">
-            <a:solidFill>
-              <a:srgbClr val="CCCCCC"/>
-            </a:solidFill>
-          </a:ln>
-        </p:spPr>
-      </p:pic>
       <p:pic>
         <p:nvPicPr>
           <p:cNvPr id="497" name="image51.png"/>
